--- a/writeups/PacBio_Pipeline_Report.pptx
+++ b/writeups/PacBio_Pipeline_Report.pptx
@@ -3023,22 +3023,22 @@
         </p:nvSpPr>
         <p:spPr>
           <a:xfrm>
-            <a:off x="548640" y="384048"/>
-            <a:ext cx="11064240" cy="365760"/>
-          </a:xfrm>
-          <a:prstGeom prst="rect">
-            <a:avLst/>
-          </a:prstGeom>
-          <a:noFill/>
-        </p:spPr>
-        <p:txBody>
-          <a:bodyPr wrap="square">
-            <a:spAutoFit/>
-          </a:bodyPr>
-          <a:lstStyle/>
-          <a:p>
-            <a:r>
-              <a:rPr sz="1250" b="1" i="0">
+            <a:off x="548640" y="365760"/>
+            <a:ext cx="11064240" cy="400000"/>
+          </a:xfrm>
+          <a:prstGeom prst="rect">
+            <a:avLst/>
+          </a:prstGeom>
+          <a:noFill/>
+        </p:spPr>
+        <p:txBody>
+          <a:bodyPr wrap="square">
+            <a:spAutoFit/>
+          </a:bodyPr>
+          <a:lstStyle/>
+          <a:p>
+            <a:r>
+              <a:rPr sz="1400" b="1" i="0">
                 <a:solidFill>
                   <a:srgbClr val="C8603A"/>
                 </a:solidFill>
@@ -3057,22 +3057,22 @@
         </p:nvSpPr>
         <p:spPr>
           <a:xfrm>
-            <a:off x="548640" y="658368"/>
-            <a:ext cx="11064240" cy="640080"/>
-          </a:xfrm>
-          <a:prstGeom prst="rect">
-            <a:avLst/>
-          </a:prstGeom>
-          <a:noFill/>
-        </p:spPr>
-        <p:txBody>
-          <a:bodyPr wrap="square">
-            <a:spAutoFit/>
-          </a:bodyPr>
-          <a:lstStyle/>
-          <a:p>
-            <a:r>
-              <a:rPr sz="2700" b="1" i="0">
+            <a:off x="548640" y="685800"/>
+            <a:ext cx="11064240" cy="820000"/>
+          </a:xfrm>
+          <a:prstGeom prst="rect">
+            <a:avLst/>
+          </a:prstGeom>
+          <a:noFill/>
+        </p:spPr>
+        <p:txBody>
+          <a:bodyPr wrap="square">
+            <a:spAutoFit/>
+          </a:bodyPr>
+          <a:lstStyle/>
+          <a:p>
+            <a:r>
+              <a:rPr sz="3300" b="1" i="0">
                 <a:solidFill>
                   <a:srgbClr val="1A1A17"/>
                 </a:solidFill>
@@ -3091,7 +3091,7 @@
         </p:nvSpPr>
         <p:spPr>
           <a:xfrm>
-            <a:off x="576072" y="1371600"/>
+            <a:off x="576072" y="1524000"/>
             <a:ext cx="713232" cy="38100"/>
           </a:xfrm>
           <a:prstGeom prst="roundRect">
@@ -3118,22 +3118,22 @@
         </p:nvSpPr>
         <p:spPr>
           <a:xfrm>
-            <a:off x="548640" y="1600000"/>
-            <a:ext cx="11064240" cy="400000"/>
-          </a:xfrm>
-          <a:prstGeom prst="rect">
-            <a:avLst/>
-          </a:prstGeom>
-          <a:noFill/>
-        </p:spPr>
-        <p:txBody>
-          <a:bodyPr wrap="square">
-            <a:spAutoFit/>
-          </a:bodyPr>
-          <a:lstStyle/>
-          <a:p>
-            <a:r>
-              <a:rPr sz="1500" b="0" i="0">
+            <a:off x="548640" y="2500000"/>
+            <a:ext cx="11064240" cy="1190000"/>
+          </a:xfrm>
+          <a:prstGeom prst="rect">
+            <a:avLst/>
+          </a:prstGeom>
+          <a:noFill/>
+        </p:spPr>
+        <p:txBody>
+          <a:bodyPr wrap="square">
+            <a:spAutoFit/>
+          </a:bodyPr>
+          <a:lstStyle/>
+          <a:p>
+            <a:r>
+              <a:rPr sz="1850" b="0" i="0">
                 <a:solidFill>
                   <a:srgbClr val="5A5A52"/>
                 </a:solidFill>
@@ -3152,22 +3152,22 @@
         </p:nvSpPr>
         <p:spPr>
           <a:xfrm>
-            <a:off x="548640" y="2190000"/>
-            <a:ext cx="11064240" cy="340000"/>
-          </a:xfrm>
-          <a:prstGeom prst="rect">
-            <a:avLst/>
-          </a:prstGeom>
-          <a:noFill/>
-        </p:spPr>
-        <p:txBody>
-          <a:bodyPr wrap="square">
-            <a:spAutoFit/>
-          </a:bodyPr>
-          <a:lstStyle/>
-          <a:p>
-            <a:r>
-              <a:rPr sz="1400" b="1" i="0">
+            <a:off x="548640" y="3230000"/>
+            <a:ext cx="11064240" cy="1130000"/>
+          </a:xfrm>
+          <a:prstGeom prst="rect">
+            <a:avLst/>
+          </a:prstGeom>
+          <a:noFill/>
+        </p:spPr>
+        <p:txBody>
+          <a:bodyPr wrap="square">
+            <a:spAutoFit/>
+          </a:bodyPr>
+          <a:lstStyle/>
+          <a:p>
+            <a:r>
+              <a:rPr sz="1750" b="1" i="0">
                 <a:solidFill>
                   <a:srgbClr val="C8603A"/>
                 </a:solidFill>
@@ -3186,22 +3186,22 @@
         </p:nvSpPr>
         <p:spPr>
           <a:xfrm>
-            <a:off x="548640" y="2690000"/>
-            <a:ext cx="11064240" cy="340000"/>
-          </a:xfrm>
-          <a:prstGeom prst="rect">
-            <a:avLst/>
-          </a:prstGeom>
-          <a:noFill/>
-        </p:spPr>
-        <p:txBody>
-          <a:bodyPr wrap="square">
-            <a:spAutoFit/>
-          </a:bodyPr>
-          <a:lstStyle/>
-          <a:p>
-            <a:r>
-              <a:rPr sz="1400" b="0" i="0">
+            <a:off x="548640" y="3855000"/>
+            <a:ext cx="11064240" cy="1130000"/>
+          </a:xfrm>
+          <a:prstGeom prst="rect">
+            <a:avLst/>
+          </a:prstGeom>
+          <a:noFill/>
+        </p:spPr>
+        <p:txBody>
+          <a:bodyPr wrap="square">
+            <a:spAutoFit/>
+          </a:bodyPr>
+          <a:lstStyle/>
+          <a:p>
+            <a:r>
+              <a:rPr sz="1750" b="0" i="0">
                 <a:solidFill>
                   <a:srgbClr val="1A1A17"/>
                 </a:solidFill>
@@ -3220,22 +3220,22 @@
         </p:nvSpPr>
         <p:spPr>
           <a:xfrm>
-            <a:off x="548640" y="3020000"/>
-            <a:ext cx="11064240" cy="340000"/>
-          </a:xfrm>
-          <a:prstGeom prst="rect">
-            <a:avLst/>
-          </a:prstGeom>
-          <a:noFill/>
-        </p:spPr>
-        <p:txBody>
-          <a:bodyPr wrap="square">
-            <a:spAutoFit/>
-          </a:bodyPr>
-          <a:lstStyle/>
-          <a:p>
-            <a:r>
-              <a:rPr sz="1400" b="0" i="0">
+            <a:off x="548640" y="4270000"/>
+            <a:ext cx="11064240" cy="1130000"/>
+          </a:xfrm>
+          <a:prstGeom prst="rect">
+            <a:avLst/>
+          </a:prstGeom>
+          <a:noFill/>
+        </p:spPr>
+        <p:txBody>
+          <a:bodyPr wrap="square">
+            <a:spAutoFit/>
+          </a:bodyPr>
+          <a:lstStyle/>
+          <a:p>
+            <a:r>
+              <a:rPr sz="1750" b="0" i="0">
                 <a:solidFill>
                   <a:srgbClr val="1A1A17"/>
                 </a:solidFill>
@@ -3280,22 +3280,22 @@
         </p:nvSpPr>
         <p:spPr>
           <a:xfrm>
-            <a:off x="548640" y="384048"/>
-            <a:ext cx="11064240" cy="365760"/>
-          </a:xfrm>
-          <a:prstGeom prst="rect">
-            <a:avLst/>
-          </a:prstGeom>
-          <a:noFill/>
-        </p:spPr>
-        <p:txBody>
-          <a:bodyPr wrap="square">
-            <a:spAutoFit/>
-          </a:bodyPr>
-          <a:lstStyle/>
-          <a:p>
-            <a:r>
-              <a:rPr sz="1250" b="1" i="0">
+            <a:off x="548640" y="365760"/>
+            <a:ext cx="11064240" cy="400000"/>
+          </a:xfrm>
+          <a:prstGeom prst="rect">
+            <a:avLst/>
+          </a:prstGeom>
+          <a:noFill/>
+        </p:spPr>
+        <p:txBody>
+          <a:bodyPr wrap="square">
+            <a:spAutoFit/>
+          </a:bodyPr>
+          <a:lstStyle/>
+          <a:p>
+            <a:r>
+              <a:rPr sz="1400" b="1" i="0">
                 <a:solidFill>
                   <a:srgbClr val="C8603A"/>
                 </a:solidFill>
@@ -3314,22 +3314,22 @@
         </p:nvSpPr>
         <p:spPr>
           <a:xfrm>
-            <a:off x="548640" y="658368"/>
-            <a:ext cx="11064240" cy="640080"/>
-          </a:xfrm>
-          <a:prstGeom prst="rect">
-            <a:avLst/>
-          </a:prstGeom>
-          <a:noFill/>
-        </p:spPr>
-        <p:txBody>
-          <a:bodyPr wrap="square">
-            <a:spAutoFit/>
-          </a:bodyPr>
-          <a:lstStyle/>
-          <a:p>
-            <a:r>
-              <a:rPr sz="2700" b="1" i="0">
+            <a:off x="548640" y="685800"/>
+            <a:ext cx="11064240" cy="820000"/>
+          </a:xfrm>
+          <a:prstGeom prst="rect">
+            <a:avLst/>
+          </a:prstGeom>
+          <a:noFill/>
+        </p:spPr>
+        <p:txBody>
+          <a:bodyPr wrap="square">
+            <a:spAutoFit/>
+          </a:bodyPr>
+          <a:lstStyle/>
+          <a:p>
+            <a:r>
+              <a:rPr sz="3300" b="1" i="0">
                 <a:solidFill>
                   <a:srgbClr val="1A1A17"/>
                 </a:solidFill>
@@ -3348,7 +3348,7 @@
         </p:nvSpPr>
         <p:spPr>
           <a:xfrm>
-            <a:off x="576072" y="1371600"/>
+            <a:off x="576072" y="1524000"/>
             <a:ext cx="713232" cy="38100"/>
           </a:xfrm>
           <a:prstGeom prst="roundRect">
@@ -3375,22 +3375,22 @@
         </p:nvSpPr>
         <p:spPr>
           <a:xfrm>
-            <a:off x="548640" y="1600000"/>
-            <a:ext cx="11064240" cy="400000"/>
-          </a:xfrm>
-          <a:prstGeom prst="rect">
-            <a:avLst/>
-          </a:prstGeom>
-          <a:noFill/>
-        </p:spPr>
-        <p:txBody>
-          <a:bodyPr wrap="square">
-            <a:spAutoFit/>
-          </a:bodyPr>
-          <a:lstStyle/>
-          <a:p>
-            <a:r>
-              <a:rPr sz="1500" b="0" i="0">
+            <a:off x="548640" y="2500000"/>
+            <a:ext cx="11064240" cy="1190000"/>
+          </a:xfrm>
+          <a:prstGeom prst="rect">
+            <a:avLst/>
+          </a:prstGeom>
+          <a:noFill/>
+        </p:spPr>
+        <p:txBody>
+          <a:bodyPr wrap="square">
+            <a:spAutoFit/>
+          </a:bodyPr>
+          <a:lstStyle/>
+          <a:p>
+            <a:r>
+              <a:rPr sz="1850" b="0" i="0">
                 <a:solidFill>
                   <a:srgbClr val="5A5A52"/>
                 </a:solidFill>
@@ -3409,22 +3409,22 @@
         </p:nvSpPr>
         <p:spPr>
           <a:xfrm>
-            <a:off x="548640" y="2190000"/>
-            <a:ext cx="11064240" cy="260000"/>
-          </a:xfrm>
-          <a:prstGeom prst="rect">
-            <a:avLst/>
-          </a:prstGeom>
-          <a:noFill/>
-        </p:spPr>
-        <p:txBody>
-          <a:bodyPr wrap="square">
-            <a:spAutoFit/>
-          </a:bodyPr>
-          <a:lstStyle/>
-          <a:p>
-            <a:r>
-              <a:rPr sz="1050" b="0" i="0">
+            <a:off x="548640" y="3230000"/>
+            <a:ext cx="11064240" cy="1030000"/>
+          </a:xfrm>
+          <a:prstGeom prst="rect">
+            <a:avLst/>
+          </a:prstGeom>
+          <a:noFill/>
+        </p:spPr>
+        <p:txBody>
+          <a:bodyPr wrap="square">
+            <a:spAutoFit/>
+          </a:bodyPr>
+          <a:lstStyle/>
+          <a:p>
+            <a:r>
+              <a:rPr sz="1400" b="0" i="0">
                 <a:solidFill>
                   <a:srgbClr val="1A1A17"/>
                 </a:solidFill>
@@ -3443,22 +3443,22 @@
         </p:nvSpPr>
         <p:spPr>
           <a:xfrm>
-            <a:off x="548640" y="2425000"/>
-            <a:ext cx="11064240" cy="260000"/>
-          </a:xfrm>
-          <a:prstGeom prst="rect">
-            <a:avLst/>
-          </a:prstGeom>
-          <a:noFill/>
-        </p:spPr>
-        <p:txBody>
-          <a:bodyPr wrap="square">
-            <a:spAutoFit/>
-          </a:bodyPr>
-          <a:lstStyle/>
-          <a:p>
-            <a:r>
-              <a:rPr sz="1050" b="0" i="0">
+            <a:off x="548640" y="3530000"/>
+            <a:ext cx="11064240" cy="1030000"/>
+          </a:xfrm>
+          <a:prstGeom prst="rect">
+            <a:avLst/>
+          </a:prstGeom>
+          <a:noFill/>
+        </p:spPr>
+        <p:txBody>
+          <a:bodyPr wrap="square">
+            <a:spAutoFit/>
+          </a:bodyPr>
+          <a:lstStyle/>
+          <a:p>
+            <a:r>
+              <a:rPr sz="1400" b="0" i="0">
                 <a:solidFill>
                   <a:srgbClr val="1A1A17"/>
                 </a:solidFill>
@@ -3477,22 +3477,22 @@
         </p:nvSpPr>
         <p:spPr>
           <a:xfrm>
-            <a:off x="548640" y="2660000"/>
-            <a:ext cx="11064240" cy="260000"/>
-          </a:xfrm>
-          <a:prstGeom prst="rect">
-            <a:avLst/>
-          </a:prstGeom>
-          <a:noFill/>
-        </p:spPr>
-        <p:txBody>
-          <a:bodyPr wrap="square">
-            <a:spAutoFit/>
-          </a:bodyPr>
-          <a:lstStyle/>
-          <a:p>
-            <a:r>
-              <a:rPr sz="1050" b="0" i="0">
+            <a:off x="548640" y="3830000"/>
+            <a:ext cx="11064240" cy="1030000"/>
+          </a:xfrm>
+          <a:prstGeom prst="rect">
+            <a:avLst/>
+          </a:prstGeom>
+          <a:noFill/>
+        </p:spPr>
+        <p:txBody>
+          <a:bodyPr wrap="square">
+            <a:spAutoFit/>
+          </a:bodyPr>
+          <a:lstStyle/>
+          <a:p>
+            <a:r>
+              <a:rPr sz="1400" b="0" i="0">
                 <a:solidFill>
                   <a:srgbClr val="1A1A17"/>
                 </a:solidFill>
@@ -3511,22 +3511,22 @@
         </p:nvSpPr>
         <p:spPr>
           <a:xfrm>
-            <a:off x="548640" y="2895000"/>
-            <a:ext cx="11064240" cy="260000"/>
-          </a:xfrm>
-          <a:prstGeom prst="rect">
-            <a:avLst/>
-          </a:prstGeom>
-          <a:noFill/>
-        </p:spPr>
-        <p:txBody>
-          <a:bodyPr wrap="square">
-            <a:spAutoFit/>
-          </a:bodyPr>
-          <a:lstStyle/>
-          <a:p>
-            <a:r>
-              <a:rPr sz="1050" b="0" i="0">
+            <a:off x="548640" y="4130000"/>
+            <a:ext cx="11064240" cy="1030000"/>
+          </a:xfrm>
+          <a:prstGeom prst="rect">
+            <a:avLst/>
+          </a:prstGeom>
+          <a:noFill/>
+        </p:spPr>
+        <p:txBody>
+          <a:bodyPr wrap="square">
+            <a:spAutoFit/>
+          </a:bodyPr>
+          <a:lstStyle/>
+          <a:p>
+            <a:r>
+              <a:rPr sz="1400" b="0" i="0">
                 <a:solidFill>
                   <a:srgbClr val="1A1A17"/>
                 </a:solidFill>
@@ -3545,22 +3545,22 @@
         </p:nvSpPr>
         <p:spPr>
           <a:xfrm>
-            <a:off x="548640" y="3130000"/>
-            <a:ext cx="11064240" cy="260000"/>
-          </a:xfrm>
-          <a:prstGeom prst="rect">
-            <a:avLst/>
-          </a:prstGeom>
-          <a:noFill/>
-        </p:spPr>
-        <p:txBody>
-          <a:bodyPr wrap="square">
-            <a:spAutoFit/>
-          </a:bodyPr>
-          <a:lstStyle/>
-          <a:p>
-            <a:r>
-              <a:rPr sz="1050" b="0" i="0">
+            <a:off x="548640" y="4430000"/>
+            <a:ext cx="11064240" cy="1030000"/>
+          </a:xfrm>
+          <a:prstGeom prst="rect">
+            <a:avLst/>
+          </a:prstGeom>
+          <a:noFill/>
+        </p:spPr>
+        <p:txBody>
+          <a:bodyPr wrap="square">
+            <a:spAutoFit/>
+          </a:bodyPr>
+          <a:lstStyle/>
+          <a:p>
+            <a:r>
+              <a:rPr sz="1400" b="0" i="0">
                 <a:solidFill>
                   <a:srgbClr val="1A1A17"/>
                 </a:solidFill>
@@ -3579,22 +3579,22 @@
         </p:nvSpPr>
         <p:spPr>
           <a:xfrm>
-            <a:off x="548640" y="3365000"/>
-            <a:ext cx="11064240" cy="260000"/>
-          </a:xfrm>
-          <a:prstGeom prst="rect">
-            <a:avLst/>
-          </a:prstGeom>
-          <a:noFill/>
-        </p:spPr>
-        <p:txBody>
-          <a:bodyPr wrap="square">
-            <a:spAutoFit/>
-          </a:bodyPr>
-          <a:lstStyle/>
-          <a:p>
-            <a:r>
-              <a:rPr sz="1050" b="0" i="0">
+            <a:off x="548640" y="4730000"/>
+            <a:ext cx="11064240" cy="1030000"/>
+          </a:xfrm>
+          <a:prstGeom prst="rect">
+            <a:avLst/>
+          </a:prstGeom>
+          <a:noFill/>
+        </p:spPr>
+        <p:txBody>
+          <a:bodyPr wrap="square">
+            <a:spAutoFit/>
+          </a:bodyPr>
+          <a:lstStyle/>
+          <a:p>
+            <a:r>
+              <a:rPr sz="1400" b="0" i="0">
                 <a:solidFill>
                   <a:srgbClr val="1A1A17"/>
                 </a:solidFill>
@@ -3613,22 +3613,22 @@
         </p:nvSpPr>
         <p:spPr>
           <a:xfrm>
-            <a:off x="548640" y="3760000"/>
-            <a:ext cx="11064240" cy="340000"/>
-          </a:xfrm>
-          <a:prstGeom prst="rect">
-            <a:avLst/>
-          </a:prstGeom>
-          <a:noFill/>
-        </p:spPr>
-        <p:txBody>
-          <a:bodyPr wrap="square">
-            <a:spAutoFit/>
-          </a:bodyPr>
-          <a:lstStyle/>
-          <a:p>
-            <a:r>
-              <a:rPr sz="1400" b="1" i="0">
+            <a:off x="548640" y="5230000"/>
+            <a:ext cx="11064240" cy="1130000"/>
+          </a:xfrm>
+          <a:prstGeom prst="rect">
+            <a:avLst/>
+          </a:prstGeom>
+          <a:noFill/>
+        </p:spPr>
+        <p:txBody>
+          <a:bodyPr wrap="square">
+            <a:spAutoFit/>
+          </a:bodyPr>
+          <a:lstStyle/>
+          <a:p>
+            <a:r>
+              <a:rPr sz="1750" b="1" i="0">
                 <a:solidFill>
                   <a:srgbClr val="C8603A"/>
                 </a:solidFill>
@@ -3673,22 +3673,22 @@
         </p:nvSpPr>
         <p:spPr>
           <a:xfrm>
-            <a:off x="548640" y="384048"/>
-            <a:ext cx="11064240" cy="365760"/>
-          </a:xfrm>
-          <a:prstGeom prst="rect">
-            <a:avLst/>
-          </a:prstGeom>
-          <a:noFill/>
-        </p:spPr>
-        <p:txBody>
-          <a:bodyPr wrap="square">
-            <a:spAutoFit/>
-          </a:bodyPr>
-          <a:lstStyle/>
-          <a:p>
-            <a:r>
-              <a:rPr sz="1250" b="1" i="0">
+            <a:off x="548640" y="365760"/>
+            <a:ext cx="11064240" cy="400000"/>
+          </a:xfrm>
+          <a:prstGeom prst="rect">
+            <a:avLst/>
+          </a:prstGeom>
+          <a:noFill/>
+        </p:spPr>
+        <p:txBody>
+          <a:bodyPr wrap="square">
+            <a:spAutoFit/>
+          </a:bodyPr>
+          <a:lstStyle/>
+          <a:p>
+            <a:r>
+              <a:rPr sz="1400" b="1" i="0">
                 <a:solidFill>
                   <a:srgbClr val="C8603A"/>
                 </a:solidFill>
@@ -3707,22 +3707,22 @@
         </p:nvSpPr>
         <p:spPr>
           <a:xfrm>
-            <a:off x="548640" y="658368"/>
-            <a:ext cx="11064240" cy="640080"/>
-          </a:xfrm>
-          <a:prstGeom prst="rect">
-            <a:avLst/>
-          </a:prstGeom>
-          <a:noFill/>
-        </p:spPr>
-        <p:txBody>
-          <a:bodyPr wrap="square">
-            <a:spAutoFit/>
-          </a:bodyPr>
-          <a:lstStyle/>
-          <a:p>
-            <a:r>
-              <a:rPr sz="2700" b="1" i="0">
+            <a:off x="548640" y="685800"/>
+            <a:ext cx="11064240" cy="820000"/>
+          </a:xfrm>
+          <a:prstGeom prst="rect">
+            <a:avLst/>
+          </a:prstGeom>
+          <a:noFill/>
+        </p:spPr>
+        <p:txBody>
+          <a:bodyPr wrap="square">
+            <a:spAutoFit/>
+          </a:bodyPr>
+          <a:lstStyle/>
+          <a:p>
+            <a:r>
+              <a:rPr sz="3300" b="1" i="0">
                 <a:solidFill>
                   <a:srgbClr val="1A1A17"/>
                 </a:solidFill>
@@ -3741,7 +3741,7 @@
         </p:nvSpPr>
         <p:spPr>
           <a:xfrm>
-            <a:off x="576072" y="1371600"/>
+            <a:off x="576072" y="1524000"/>
             <a:ext cx="713232" cy="38100"/>
           </a:xfrm>
           <a:prstGeom prst="roundRect">
@@ -3768,22 +3768,22 @@
         </p:nvSpPr>
         <p:spPr>
           <a:xfrm>
-            <a:off x="548640" y="1600000"/>
-            <a:ext cx="11064240" cy="400000"/>
-          </a:xfrm>
-          <a:prstGeom prst="rect">
-            <a:avLst/>
-          </a:prstGeom>
-          <a:noFill/>
-        </p:spPr>
-        <p:txBody>
-          <a:bodyPr wrap="square">
-            <a:spAutoFit/>
-          </a:bodyPr>
-          <a:lstStyle/>
-          <a:p>
-            <a:r>
-              <a:rPr sz="1500" b="0" i="0">
+            <a:off x="548640" y="2500000"/>
+            <a:ext cx="11064240" cy="1190000"/>
+          </a:xfrm>
+          <a:prstGeom prst="rect">
+            <a:avLst/>
+          </a:prstGeom>
+          <a:noFill/>
+        </p:spPr>
+        <p:txBody>
+          <a:bodyPr wrap="square">
+            <a:spAutoFit/>
+          </a:bodyPr>
+          <a:lstStyle/>
+          <a:p>
+            <a:r>
+              <a:rPr sz="1850" b="0" i="0">
                 <a:solidFill>
                   <a:srgbClr val="5A5A52"/>
                 </a:solidFill>
@@ -3802,22 +3802,22 @@
         </p:nvSpPr>
         <p:spPr>
           <a:xfrm>
-            <a:off x="548640" y="2190000"/>
-            <a:ext cx="11064240" cy="260000"/>
-          </a:xfrm>
-          <a:prstGeom prst="rect">
-            <a:avLst/>
-          </a:prstGeom>
-          <a:noFill/>
-        </p:spPr>
-        <p:txBody>
-          <a:bodyPr wrap="square">
-            <a:spAutoFit/>
-          </a:bodyPr>
-          <a:lstStyle/>
-          <a:p>
-            <a:r>
-              <a:rPr sz="1050" b="0" i="0">
+            <a:off x="548640" y="3230000"/>
+            <a:ext cx="11064240" cy="1030000"/>
+          </a:xfrm>
+          <a:prstGeom prst="rect">
+            <a:avLst/>
+          </a:prstGeom>
+          <a:noFill/>
+        </p:spPr>
+        <p:txBody>
+          <a:bodyPr wrap="square">
+            <a:spAutoFit/>
+          </a:bodyPr>
+          <a:lstStyle/>
+          <a:p>
+            <a:r>
+              <a:rPr sz="1400" b="0" i="0">
                 <a:solidFill>
                   <a:srgbClr val="1A1A17"/>
                 </a:solidFill>
@@ -3836,22 +3836,22 @@
         </p:nvSpPr>
         <p:spPr>
           <a:xfrm>
-            <a:off x="548640" y="2425000"/>
-            <a:ext cx="11064240" cy="260000"/>
-          </a:xfrm>
-          <a:prstGeom prst="rect">
-            <a:avLst/>
-          </a:prstGeom>
-          <a:noFill/>
-        </p:spPr>
-        <p:txBody>
-          <a:bodyPr wrap="square">
-            <a:spAutoFit/>
-          </a:bodyPr>
-          <a:lstStyle/>
-          <a:p>
-            <a:r>
-              <a:rPr sz="1050" b="0" i="0">
+            <a:off x="548640" y="3530000"/>
+            <a:ext cx="11064240" cy="1030000"/>
+          </a:xfrm>
+          <a:prstGeom prst="rect">
+            <a:avLst/>
+          </a:prstGeom>
+          <a:noFill/>
+        </p:spPr>
+        <p:txBody>
+          <a:bodyPr wrap="square">
+            <a:spAutoFit/>
+          </a:bodyPr>
+          <a:lstStyle/>
+          <a:p>
+            <a:r>
+              <a:rPr sz="1400" b="0" i="0">
                 <a:solidFill>
                   <a:srgbClr val="1A1A17"/>
                 </a:solidFill>
@@ -3870,22 +3870,22 @@
         </p:nvSpPr>
         <p:spPr>
           <a:xfrm>
-            <a:off x="548640" y="2660000"/>
-            <a:ext cx="11064240" cy="260000"/>
-          </a:xfrm>
-          <a:prstGeom prst="rect">
-            <a:avLst/>
-          </a:prstGeom>
-          <a:noFill/>
-        </p:spPr>
-        <p:txBody>
-          <a:bodyPr wrap="square">
-            <a:spAutoFit/>
-          </a:bodyPr>
-          <a:lstStyle/>
-          <a:p>
-            <a:r>
-              <a:rPr sz="1050" b="0" i="0">
+            <a:off x="548640" y="3830000"/>
+            <a:ext cx="11064240" cy="1030000"/>
+          </a:xfrm>
+          <a:prstGeom prst="rect">
+            <a:avLst/>
+          </a:prstGeom>
+          <a:noFill/>
+        </p:spPr>
+        <p:txBody>
+          <a:bodyPr wrap="square">
+            <a:spAutoFit/>
+          </a:bodyPr>
+          <a:lstStyle/>
+          <a:p>
+            <a:r>
+              <a:rPr sz="1400" b="0" i="0">
                 <a:solidFill>
                   <a:srgbClr val="1A1A17"/>
                 </a:solidFill>
@@ -3904,22 +3904,22 @@
         </p:nvSpPr>
         <p:spPr>
           <a:xfrm>
-            <a:off x="548640" y="2895000"/>
-            <a:ext cx="11064240" cy="260000"/>
-          </a:xfrm>
-          <a:prstGeom prst="rect">
-            <a:avLst/>
-          </a:prstGeom>
-          <a:noFill/>
-        </p:spPr>
-        <p:txBody>
-          <a:bodyPr wrap="square">
-            <a:spAutoFit/>
-          </a:bodyPr>
-          <a:lstStyle/>
-          <a:p>
-            <a:r>
-              <a:rPr sz="1050" b="0" i="0">
+            <a:off x="548640" y="4130000"/>
+            <a:ext cx="11064240" cy="1030000"/>
+          </a:xfrm>
+          <a:prstGeom prst="rect">
+            <a:avLst/>
+          </a:prstGeom>
+          <a:noFill/>
+        </p:spPr>
+        <p:txBody>
+          <a:bodyPr wrap="square">
+            <a:spAutoFit/>
+          </a:bodyPr>
+          <a:lstStyle/>
+          <a:p>
+            <a:r>
+              <a:rPr sz="1400" b="0" i="0">
                 <a:solidFill>
                   <a:srgbClr val="1A1A17"/>
                 </a:solidFill>
@@ -3938,22 +3938,22 @@
         </p:nvSpPr>
         <p:spPr>
           <a:xfrm>
-            <a:off x="548640" y="3130000"/>
-            <a:ext cx="11064240" cy="260000"/>
-          </a:xfrm>
-          <a:prstGeom prst="rect">
-            <a:avLst/>
-          </a:prstGeom>
-          <a:noFill/>
-        </p:spPr>
-        <p:txBody>
-          <a:bodyPr wrap="square">
-            <a:spAutoFit/>
-          </a:bodyPr>
-          <a:lstStyle/>
-          <a:p>
-            <a:r>
-              <a:rPr sz="1050" b="0" i="0">
+            <a:off x="548640" y="4430000"/>
+            <a:ext cx="11064240" cy="1030000"/>
+          </a:xfrm>
+          <a:prstGeom prst="rect">
+            <a:avLst/>
+          </a:prstGeom>
+          <a:noFill/>
+        </p:spPr>
+        <p:txBody>
+          <a:bodyPr wrap="square">
+            <a:spAutoFit/>
+          </a:bodyPr>
+          <a:lstStyle/>
+          <a:p>
+            <a:r>
+              <a:rPr sz="1400" b="0" i="0">
                 <a:solidFill>
                   <a:srgbClr val="1A1A17"/>
                 </a:solidFill>
@@ -3972,22 +3972,22 @@
         </p:nvSpPr>
         <p:spPr>
           <a:xfrm>
-            <a:off x="548640" y="3525000"/>
-            <a:ext cx="11064240" cy="340000"/>
-          </a:xfrm>
-          <a:prstGeom prst="rect">
-            <a:avLst/>
-          </a:prstGeom>
-          <a:noFill/>
-        </p:spPr>
-        <p:txBody>
-          <a:bodyPr wrap="square">
-            <a:spAutoFit/>
-          </a:bodyPr>
-          <a:lstStyle/>
-          <a:p>
-            <a:r>
-              <a:rPr sz="1400" b="1" i="0">
+            <a:off x="548640" y="4930000"/>
+            <a:ext cx="11064240" cy="1130000"/>
+          </a:xfrm>
+          <a:prstGeom prst="rect">
+            <a:avLst/>
+          </a:prstGeom>
+          <a:noFill/>
+        </p:spPr>
+        <p:txBody>
+          <a:bodyPr wrap="square">
+            <a:spAutoFit/>
+          </a:bodyPr>
+          <a:lstStyle/>
+          <a:p>
+            <a:r>
+              <a:rPr sz="1750" b="1" i="0">
                 <a:solidFill>
                   <a:srgbClr val="C8603A"/>
                 </a:solidFill>
@@ -4032,22 +4032,22 @@
         </p:nvSpPr>
         <p:spPr>
           <a:xfrm>
-            <a:off x="548640" y="384048"/>
-            <a:ext cx="11064240" cy="365760"/>
-          </a:xfrm>
-          <a:prstGeom prst="rect">
-            <a:avLst/>
-          </a:prstGeom>
-          <a:noFill/>
-        </p:spPr>
-        <p:txBody>
-          <a:bodyPr wrap="square">
-            <a:spAutoFit/>
-          </a:bodyPr>
-          <a:lstStyle/>
-          <a:p>
-            <a:r>
-              <a:rPr sz="1250" b="1" i="0">
+            <a:off x="548640" y="365760"/>
+            <a:ext cx="11064240" cy="400000"/>
+          </a:xfrm>
+          <a:prstGeom prst="rect">
+            <a:avLst/>
+          </a:prstGeom>
+          <a:noFill/>
+        </p:spPr>
+        <p:txBody>
+          <a:bodyPr wrap="square">
+            <a:spAutoFit/>
+          </a:bodyPr>
+          <a:lstStyle/>
+          <a:p>
+            <a:r>
+              <a:rPr sz="1400" b="1" i="0">
                 <a:solidFill>
                   <a:srgbClr val="C8603A"/>
                 </a:solidFill>
@@ -4066,22 +4066,22 @@
         </p:nvSpPr>
         <p:spPr>
           <a:xfrm>
-            <a:off x="548640" y="658368"/>
-            <a:ext cx="11064240" cy="640080"/>
-          </a:xfrm>
-          <a:prstGeom prst="rect">
-            <a:avLst/>
-          </a:prstGeom>
-          <a:noFill/>
-        </p:spPr>
-        <p:txBody>
-          <a:bodyPr wrap="square">
-            <a:spAutoFit/>
-          </a:bodyPr>
-          <a:lstStyle/>
-          <a:p>
-            <a:r>
-              <a:rPr sz="2700" b="1" i="0">
+            <a:off x="548640" y="685800"/>
+            <a:ext cx="11064240" cy="820000"/>
+          </a:xfrm>
+          <a:prstGeom prst="rect">
+            <a:avLst/>
+          </a:prstGeom>
+          <a:noFill/>
+        </p:spPr>
+        <p:txBody>
+          <a:bodyPr wrap="square">
+            <a:spAutoFit/>
+          </a:bodyPr>
+          <a:lstStyle/>
+          <a:p>
+            <a:r>
+              <a:rPr sz="3300" b="1" i="0">
                 <a:solidFill>
                   <a:srgbClr val="1A1A17"/>
                 </a:solidFill>
@@ -4100,7 +4100,7 @@
         </p:nvSpPr>
         <p:spPr>
           <a:xfrm>
-            <a:off x="576072" y="1371600"/>
+            <a:off x="576072" y="1524000"/>
             <a:ext cx="713232" cy="38100"/>
           </a:xfrm>
           <a:prstGeom prst="roundRect">
@@ -4127,22 +4127,22 @@
         </p:nvSpPr>
         <p:spPr>
           <a:xfrm>
-            <a:off x="548640" y="1600000"/>
-            <a:ext cx="11064240" cy="400000"/>
-          </a:xfrm>
-          <a:prstGeom prst="rect">
-            <a:avLst/>
-          </a:prstGeom>
-          <a:noFill/>
-        </p:spPr>
-        <p:txBody>
-          <a:bodyPr wrap="square">
-            <a:spAutoFit/>
-          </a:bodyPr>
-          <a:lstStyle/>
-          <a:p>
-            <a:r>
-              <a:rPr sz="1500" b="0" i="0">
+            <a:off x="548640" y="2500000"/>
+            <a:ext cx="11064240" cy="1190000"/>
+          </a:xfrm>
+          <a:prstGeom prst="rect">
+            <a:avLst/>
+          </a:prstGeom>
+          <a:noFill/>
+        </p:spPr>
+        <p:txBody>
+          <a:bodyPr wrap="square">
+            <a:spAutoFit/>
+          </a:bodyPr>
+          <a:lstStyle/>
+          <a:p>
+            <a:r>
+              <a:rPr sz="1850" b="0" i="0">
                 <a:solidFill>
                   <a:srgbClr val="5A5A52"/>
                 </a:solidFill>
@@ -4161,22 +4161,22 @@
         </p:nvSpPr>
         <p:spPr>
           <a:xfrm>
-            <a:off x="548640" y="2190000"/>
-            <a:ext cx="11064240" cy="340000"/>
-          </a:xfrm>
-          <a:prstGeom prst="rect">
-            <a:avLst/>
-          </a:prstGeom>
-          <a:noFill/>
-        </p:spPr>
-        <p:txBody>
-          <a:bodyPr wrap="square">
-            <a:spAutoFit/>
-          </a:bodyPr>
-          <a:lstStyle/>
-          <a:p>
-            <a:r>
-              <a:rPr sz="1400" b="0" i="0">
+            <a:off x="548640" y="3230000"/>
+            <a:ext cx="11064240" cy="1130000"/>
+          </a:xfrm>
+          <a:prstGeom prst="rect">
+            <a:avLst/>
+          </a:prstGeom>
+          <a:noFill/>
+        </p:spPr>
+        <p:txBody>
+          <a:bodyPr wrap="square">
+            <a:spAutoFit/>
+          </a:bodyPr>
+          <a:lstStyle/>
+          <a:p>
+            <a:r>
+              <a:rPr sz="1750" b="0" i="0">
                 <a:solidFill>
                   <a:srgbClr val="1A1A17"/>
                 </a:solidFill>
@@ -4195,22 +4195,22 @@
         </p:nvSpPr>
         <p:spPr>
           <a:xfrm>
-            <a:off x="548640" y="2520000"/>
-            <a:ext cx="11064240" cy="340000"/>
-          </a:xfrm>
-          <a:prstGeom prst="rect">
-            <a:avLst/>
-          </a:prstGeom>
-          <a:noFill/>
-        </p:spPr>
-        <p:txBody>
-          <a:bodyPr wrap="square">
-            <a:spAutoFit/>
-          </a:bodyPr>
-          <a:lstStyle/>
-          <a:p>
-            <a:r>
-              <a:rPr sz="1400" b="0" i="0">
+            <a:off x="548640" y="3645000"/>
+            <a:ext cx="11064240" cy="1130000"/>
+          </a:xfrm>
+          <a:prstGeom prst="rect">
+            <a:avLst/>
+          </a:prstGeom>
+          <a:noFill/>
+        </p:spPr>
+        <p:txBody>
+          <a:bodyPr wrap="square">
+            <a:spAutoFit/>
+          </a:bodyPr>
+          <a:lstStyle/>
+          <a:p>
+            <a:r>
+              <a:rPr sz="1750" b="0" i="0">
                 <a:solidFill>
                   <a:srgbClr val="1A1A17"/>
                 </a:solidFill>
@@ -4229,22 +4229,22 @@
         </p:nvSpPr>
         <p:spPr>
           <a:xfrm>
-            <a:off x="548640" y="2850000"/>
-            <a:ext cx="11064240" cy="340000"/>
-          </a:xfrm>
-          <a:prstGeom prst="rect">
-            <a:avLst/>
-          </a:prstGeom>
-          <a:noFill/>
-        </p:spPr>
-        <p:txBody>
-          <a:bodyPr wrap="square">
-            <a:spAutoFit/>
-          </a:bodyPr>
-          <a:lstStyle/>
-          <a:p>
-            <a:r>
-              <a:rPr sz="1400" b="0" i="0">
+            <a:off x="548640" y="4060000"/>
+            <a:ext cx="11064240" cy="1130000"/>
+          </a:xfrm>
+          <a:prstGeom prst="rect">
+            <a:avLst/>
+          </a:prstGeom>
+          <a:noFill/>
+        </p:spPr>
+        <p:txBody>
+          <a:bodyPr wrap="square">
+            <a:spAutoFit/>
+          </a:bodyPr>
+          <a:lstStyle/>
+          <a:p>
+            <a:r>
+              <a:rPr sz="1750" b="0" i="0">
                 <a:solidFill>
                   <a:srgbClr val="1A1A17"/>
                 </a:solidFill>
@@ -4263,22 +4263,22 @@
         </p:nvSpPr>
         <p:spPr>
           <a:xfrm>
-            <a:off x="548640" y="3180000"/>
-            <a:ext cx="11064240" cy="340000"/>
-          </a:xfrm>
-          <a:prstGeom prst="rect">
-            <a:avLst/>
-          </a:prstGeom>
-          <a:noFill/>
-        </p:spPr>
-        <p:txBody>
-          <a:bodyPr wrap="square">
-            <a:spAutoFit/>
-          </a:bodyPr>
-          <a:lstStyle/>
-          <a:p>
-            <a:r>
-              <a:rPr sz="1400" b="0" i="0">
+            <a:off x="548640" y="4475000"/>
+            <a:ext cx="11064240" cy="1130000"/>
+          </a:xfrm>
+          <a:prstGeom prst="rect">
+            <a:avLst/>
+          </a:prstGeom>
+          <a:noFill/>
+        </p:spPr>
+        <p:txBody>
+          <a:bodyPr wrap="square">
+            <a:spAutoFit/>
+          </a:bodyPr>
+          <a:lstStyle/>
+          <a:p>
+            <a:r>
+              <a:rPr sz="1750" b="0" i="0">
                 <a:solidFill>
                   <a:srgbClr val="1A1A17"/>
                 </a:solidFill>
@@ -4297,22 +4297,22 @@
         </p:nvSpPr>
         <p:spPr>
           <a:xfrm>
-            <a:off x="548640" y="3670000"/>
-            <a:ext cx="11064240" cy="340000"/>
-          </a:xfrm>
-          <a:prstGeom prst="rect">
-            <a:avLst/>
-          </a:prstGeom>
-          <a:noFill/>
-        </p:spPr>
-        <p:txBody>
-          <a:bodyPr wrap="square">
-            <a:spAutoFit/>
-          </a:bodyPr>
-          <a:lstStyle/>
-          <a:p>
-            <a:r>
-              <a:rPr sz="1400" b="1" i="0">
+            <a:off x="548640" y="5090000"/>
+            <a:ext cx="11064240" cy="1130000"/>
+          </a:xfrm>
+          <a:prstGeom prst="rect">
+            <a:avLst/>
+          </a:prstGeom>
+          <a:noFill/>
+        </p:spPr>
+        <p:txBody>
+          <a:bodyPr wrap="square">
+            <a:spAutoFit/>
+          </a:bodyPr>
+          <a:lstStyle/>
+          <a:p>
+            <a:r>
+              <a:rPr sz="1750" b="1" i="0">
                 <a:solidFill>
                   <a:srgbClr val="B3261E"/>
                 </a:solidFill>
@@ -4357,22 +4357,22 @@
         </p:nvSpPr>
         <p:spPr>
           <a:xfrm>
-            <a:off x="548640" y="384048"/>
-            <a:ext cx="11064240" cy="365760"/>
-          </a:xfrm>
-          <a:prstGeom prst="rect">
-            <a:avLst/>
-          </a:prstGeom>
-          <a:noFill/>
-        </p:spPr>
-        <p:txBody>
-          <a:bodyPr wrap="square">
-            <a:spAutoFit/>
-          </a:bodyPr>
-          <a:lstStyle/>
-          <a:p>
-            <a:r>
-              <a:rPr sz="1250" b="1" i="0">
+            <a:off x="548640" y="365760"/>
+            <a:ext cx="11064240" cy="400000"/>
+          </a:xfrm>
+          <a:prstGeom prst="rect">
+            <a:avLst/>
+          </a:prstGeom>
+          <a:noFill/>
+        </p:spPr>
+        <p:txBody>
+          <a:bodyPr wrap="square">
+            <a:spAutoFit/>
+          </a:bodyPr>
+          <a:lstStyle/>
+          <a:p>
+            <a:r>
+              <a:rPr sz="1400" b="1" i="0">
                 <a:solidFill>
                   <a:srgbClr val="C8603A"/>
                 </a:solidFill>
@@ -4391,22 +4391,22 @@
         </p:nvSpPr>
         <p:spPr>
           <a:xfrm>
-            <a:off x="548640" y="658368"/>
-            <a:ext cx="11064240" cy="640080"/>
-          </a:xfrm>
-          <a:prstGeom prst="rect">
-            <a:avLst/>
-          </a:prstGeom>
-          <a:noFill/>
-        </p:spPr>
-        <p:txBody>
-          <a:bodyPr wrap="square">
-            <a:spAutoFit/>
-          </a:bodyPr>
-          <a:lstStyle/>
-          <a:p>
-            <a:r>
-              <a:rPr sz="2700" b="1" i="0">
+            <a:off x="548640" y="685800"/>
+            <a:ext cx="11064240" cy="820000"/>
+          </a:xfrm>
+          <a:prstGeom prst="rect">
+            <a:avLst/>
+          </a:prstGeom>
+          <a:noFill/>
+        </p:spPr>
+        <p:txBody>
+          <a:bodyPr wrap="square">
+            <a:spAutoFit/>
+          </a:bodyPr>
+          <a:lstStyle/>
+          <a:p>
+            <a:r>
+              <a:rPr sz="3300" b="1" i="0">
                 <a:solidFill>
                   <a:srgbClr val="1A1A17"/>
                 </a:solidFill>
@@ -4425,7 +4425,7 @@
         </p:nvSpPr>
         <p:spPr>
           <a:xfrm>
-            <a:off x="576072" y="1371600"/>
+            <a:off x="576072" y="1524000"/>
             <a:ext cx="713232" cy="38100"/>
           </a:xfrm>
           <a:prstGeom prst="roundRect">
@@ -4452,22 +4452,22 @@
         </p:nvSpPr>
         <p:spPr>
           <a:xfrm>
-            <a:off x="548640" y="1600000"/>
-            <a:ext cx="11064240" cy="400000"/>
-          </a:xfrm>
-          <a:prstGeom prst="rect">
-            <a:avLst/>
-          </a:prstGeom>
-          <a:noFill/>
-        </p:spPr>
-        <p:txBody>
-          <a:bodyPr wrap="square">
-            <a:spAutoFit/>
-          </a:bodyPr>
-          <a:lstStyle/>
-          <a:p>
-            <a:r>
-              <a:rPr sz="1500" b="0" i="0">
+            <a:off x="548640" y="1885000"/>
+            <a:ext cx="11064240" cy="575000"/>
+          </a:xfrm>
+          <a:prstGeom prst="rect">
+            <a:avLst/>
+          </a:prstGeom>
+          <a:noFill/>
+        </p:spPr>
+        <p:txBody>
+          <a:bodyPr wrap="square">
+            <a:spAutoFit/>
+          </a:bodyPr>
+          <a:lstStyle/>
+          <a:p>
+            <a:r>
+              <a:rPr sz="1850" b="0" i="0">
                 <a:solidFill>
                   <a:srgbClr val="5A5A52"/>
                 </a:solidFill>
@@ -4486,22 +4486,22 @@
         </p:nvSpPr>
         <p:spPr>
           <a:xfrm>
-            <a:off x="548640" y="2190000"/>
-            <a:ext cx="11064240" cy="260000"/>
-          </a:xfrm>
-          <a:prstGeom prst="rect">
-            <a:avLst/>
-          </a:prstGeom>
-          <a:noFill/>
-        </p:spPr>
-        <p:txBody>
-          <a:bodyPr wrap="square">
-            <a:spAutoFit/>
-          </a:bodyPr>
-          <a:lstStyle/>
-          <a:p>
-            <a:r>
-              <a:rPr sz="1050" b="0" i="0">
+            <a:off x="548640" y="2615000"/>
+            <a:ext cx="11064240" cy="415000"/>
+          </a:xfrm>
+          <a:prstGeom prst="rect">
+            <a:avLst/>
+          </a:prstGeom>
+          <a:noFill/>
+        </p:spPr>
+        <p:txBody>
+          <a:bodyPr wrap="square">
+            <a:spAutoFit/>
+          </a:bodyPr>
+          <a:lstStyle/>
+          <a:p>
+            <a:r>
+              <a:rPr sz="1400" b="0" i="0">
                 <a:solidFill>
                   <a:srgbClr val="1A1A17"/>
                 </a:solidFill>
@@ -4520,22 +4520,22 @@
         </p:nvSpPr>
         <p:spPr>
           <a:xfrm>
-            <a:off x="548640" y="2425000"/>
-            <a:ext cx="11064240" cy="260000"/>
-          </a:xfrm>
-          <a:prstGeom prst="rect">
-            <a:avLst/>
-          </a:prstGeom>
-          <a:noFill/>
-        </p:spPr>
-        <p:txBody>
-          <a:bodyPr wrap="square">
-            <a:spAutoFit/>
-          </a:bodyPr>
-          <a:lstStyle/>
-          <a:p>
-            <a:r>
-              <a:rPr sz="1050" b="0" i="0">
+            <a:off x="548640" y="2915000"/>
+            <a:ext cx="11064240" cy="415000"/>
+          </a:xfrm>
+          <a:prstGeom prst="rect">
+            <a:avLst/>
+          </a:prstGeom>
+          <a:noFill/>
+        </p:spPr>
+        <p:txBody>
+          <a:bodyPr wrap="square">
+            <a:spAutoFit/>
+          </a:bodyPr>
+          <a:lstStyle/>
+          <a:p>
+            <a:r>
+              <a:rPr sz="1400" b="0" i="0">
                 <a:solidFill>
                   <a:srgbClr val="1A1A17"/>
                 </a:solidFill>
@@ -4554,22 +4554,22 @@
         </p:nvSpPr>
         <p:spPr>
           <a:xfrm>
-            <a:off x="548640" y="2660000"/>
-            <a:ext cx="11064240" cy="260000"/>
-          </a:xfrm>
-          <a:prstGeom prst="rect">
-            <a:avLst/>
-          </a:prstGeom>
-          <a:noFill/>
-        </p:spPr>
-        <p:txBody>
-          <a:bodyPr wrap="square">
-            <a:spAutoFit/>
-          </a:bodyPr>
-          <a:lstStyle/>
-          <a:p>
-            <a:r>
-              <a:rPr sz="1050" b="0" i="0">
+            <a:off x="548640" y="3215000"/>
+            <a:ext cx="11064240" cy="415000"/>
+          </a:xfrm>
+          <a:prstGeom prst="rect">
+            <a:avLst/>
+          </a:prstGeom>
+          <a:noFill/>
+        </p:spPr>
+        <p:txBody>
+          <a:bodyPr wrap="square">
+            <a:spAutoFit/>
+          </a:bodyPr>
+          <a:lstStyle/>
+          <a:p>
+            <a:r>
+              <a:rPr sz="1400" b="0" i="0">
                 <a:solidFill>
                   <a:srgbClr val="1A1A17"/>
                 </a:solidFill>
@@ -4588,22 +4588,22 @@
         </p:nvSpPr>
         <p:spPr>
           <a:xfrm>
-            <a:off x="548640" y="2895000"/>
-            <a:ext cx="11064240" cy="260000"/>
-          </a:xfrm>
-          <a:prstGeom prst="rect">
-            <a:avLst/>
-          </a:prstGeom>
-          <a:noFill/>
-        </p:spPr>
-        <p:txBody>
-          <a:bodyPr wrap="square">
-            <a:spAutoFit/>
-          </a:bodyPr>
-          <a:lstStyle/>
-          <a:p>
-            <a:r>
-              <a:rPr sz="1050" b="0" i="0">
+            <a:off x="548640" y="3515000"/>
+            <a:ext cx="11064240" cy="415000"/>
+          </a:xfrm>
+          <a:prstGeom prst="rect">
+            <a:avLst/>
+          </a:prstGeom>
+          <a:noFill/>
+        </p:spPr>
+        <p:txBody>
+          <a:bodyPr wrap="square">
+            <a:spAutoFit/>
+          </a:bodyPr>
+          <a:lstStyle/>
+          <a:p>
+            <a:r>
+              <a:rPr sz="1400" b="0" i="0">
                 <a:solidFill>
                   <a:srgbClr val="1A1A17"/>
                 </a:solidFill>
@@ -4622,22 +4622,22 @@
         </p:nvSpPr>
         <p:spPr>
           <a:xfrm>
-            <a:off x="548640" y="3130000"/>
-            <a:ext cx="11064240" cy="260000"/>
-          </a:xfrm>
-          <a:prstGeom prst="rect">
-            <a:avLst/>
-          </a:prstGeom>
-          <a:noFill/>
-        </p:spPr>
-        <p:txBody>
-          <a:bodyPr wrap="square">
-            <a:spAutoFit/>
-          </a:bodyPr>
-          <a:lstStyle/>
-          <a:p>
-            <a:r>
-              <a:rPr sz="1050" b="0" i="0">
+            <a:off x="548640" y="3815000"/>
+            <a:ext cx="11064240" cy="415000"/>
+          </a:xfrm>
+          <a:prstGeom prst="rect">
+            <a:avLst/>
+          </a:prstGeom>
+          <a:noFill/>
+        </p:spPr>
+        <p:txBody>
+          <a:bodyPr wrap="square">
+            <a:spAutoFit/>
+          </a:bodyPr>
+          <a:lstStyle/>
+          <a:p>
+            <a:r>
+              <a:rPr sz="1400" b="0" i="0">
                 <a:solidFill>
                   <a:srgbClr val="1A1A17"/>
                 </a:solidFill>
@@ -4656,22 +4656,22 @@
         </p:nvSpPr>
         <p:spPr>
           <a:xfrm>
-            <a:off x="548640" y="3365000"/>
-            <a:ext cx="11064240" cy="260000"/>
-          </a:xfrm>
-          <a:prstGeom prst="rect">
-            <a:avLst/>
-          </a:prstGeom>
-          <a:noFill/>
-        </p:spPr>
-        <p:txBody>
-          <a:bodyPr wrap="square">
-            <a:spAutoFit/>
-          </a:bodyPr>
-          <a:lstStyle/>
-          <a:p>
-            <a:r>
-              <a:rPr sz="1050" b="0" i="0">
+            <a:off x="548640" y="4115000"/>
+            <a:ext cx="11064240" cy="415000"/>
+          </a:xfrm>
+          <a:prstGeom prst="rect">
+            <a:avLst/>
+          </a:prstGeom>
+          <a:noFill/>
+        </p:spPr>
+        <p:txBody>
+          <a:bodyPr wrap="square">
+            <a:spAutoFit/>
+          </a:bodyPr>
+          <a:lstStyle/>
+          <a:p>
+            <a:r>
+              <a:rPr sz="1400" b="0" i="0">
                 <a:solidFill>
                   <a:srgbClr val="1A1A17"/>
                 </a:solidFill>
@@ -4690,22 +4690,22 @@
         </p:nvSpPr>
         <p:spPr>
           <a:xfrm>
-            <a:off x="548640" y="3600000"/>
-            <a:ext cx="11064240" cy="260000"/>
-          </a:xfrm>
-          <a:prstGeom prst="rect">
-            <a:avLst/>
-          </a:prstGeom>
-          <a:noFill/>
-        </p:spPr>
-        <p:txBody>
-          <a:bodyPr wrap="square">
-            <a:spAutoFit/>
-          </a:bodyPr>
-          <a:lstStyle/>
-          <a:p>
-            <a:r>
-              <a:rPr sz="1050" b="0" i="0">
+            <a:off x="548640" y="4415000"/>
+            <a:ext cx="11064240" cy="415000"/>
+          </a:xfrm>
+          <a:prstGeom prst="rect">
+            <a:avLst/>
+          </a:prstGeom>
+          <a:noFill/>
+        </p:spPr>
+        <p:txBody>
+          <a:bodyPr wrap="square">
+            <a:spAutoFit/>
+          </a:bodyPr>
+          <a:lstStyle/>
+          <a:p>
+            <a:r>
+              <a:rPr sz="1400" b="0" i="0">
                 <a:solidFill>
                   <a:srgbClr val="1A1A17"/>
                 </a:solidFill>
@@ -4724,22 +4724,22 @@
         </p:nvSpPr>
         <p:spPr>
           <a:xfrm>
-            <a:off x="548640" y="3835000"/>
-            <a:ext cx="11064240" cy="260000"/>
-          </a:xfrm>
-          <a:prstGeom prst="rect">
-            <a:avLst/>
-          </a:prstGeom>
-          <a:noFill/>
-        </p:spPr>
-        <p:txBody>
-          <a:bodyPr wrap="square">
-            <a:spAutoFit/>
-          </a:bodyPr>
-          <a:lstStyle/>
-          <a:p>
-            <a:r>
-              <a:rPr sz="1050" b="0" i="0">
+            <a:off x="548640" y="4715000"/>
+            <a:ext cx="11064240" cy="415000"/>
+          </a:xfrm>
+          <a:prstGeom prst="rect">
+            <a:avLst/>
+          </a:prstGeom>
+          <a:noFill/>
+        </p:spPr>
+        <p:txBody>
+          <a:bodyPr wrap="square">
+            <a:spAutoFit/>
+          </a:bodyPr>
+          <a:lstStyle/>
+          <a:p>
+            <a:r>
+              <a:rPr sz="1400" b="0" i="0">
                 <a:solidFill>
                   <a:srgbClr val="1A1A17"/>
                 </a:solidFill>
@@ -4758,22 +4758,22 @@
         </p:nvSpPr>
         <p:spPr>
           <a:xfrm>
-            <a:off x="548640" y="4070000"/>
-            <a:ext cx="11064240" cy="260000"/>
-          </a:xfrm>
-          <a:prstGeom prst="rect">
-            <a:avLst/>
-          </a:prstGeom>
-          <a:noFill/>
-        </p:spPr>
-        <p:txBody>
-          <a:bodyPr wrap="square">
-            <a:spAutoFit/>
-          </a:bodyPr>
-          <a:lstStyle/>
-          <a:p>
-            <a:r>
-              <a:rPr sz="1050" b="0" i="0">
+            <a:off x="548640" y="5015000"/>
+            <a:ext cx="11064240" cy="415000"/>
+          </a:xfrm>
+          <a:prstGeom prst="rect">
+            <a:avLst/>
+          </a:prstGeom>
+          <a:noFill/>
+        </p:spPr>
+        <p:txBody>
+          <a:bodyPr wrap="square">
+            <a:spAutoFit/>
+          </a:bodyPr>
+          <a:lstStyle/>
+          <a:p>
+            <a:r>
+              <a:rPr sz="1400" b="0" i="0">
                 <a:solidFill>
                   <a:srgbClr val="1A1A17"/>
                 </a:solidFill>
@@ -4792,22 +4792,22 @@
         </p:nvSpPr>
         <p:spPr>
           <a:xfrm>
-            <a:off x="548640" y="4305000"/>
-            <a:ext cx="11064240" cy="260000"/>
-          </a:xfrm>
-          <a:prstGeom prst="rect">
-            <a:avLst/>
-          </a:prstGeom>
-          <a:noFill/>
-        </p:spPr>
-        <p:txBody>
-          <a:bodyPr wrap="square">
-            <a:spAutoFit/>
-          </a:bodyPr>
-          <a:lstStyle/>
-          <a:p>
-            <a:r>
-              <a:rPr sz="1050" b="0" i="0">
+            <a:off x="548640" y="5315000"/>
+            <a:ext cx="11064240" cy="415000"/>
+          </a:xfrm>
+          <a:prstGeom prst="rect">
+            <a:avLst/>
+          </a:prstGeom>
+          <a:noFill/>
+        </p:spPr>
+        <p:txBody>
+          <a:bodyPr wrap="square">
+            <a:spAutoFit/>
+          </a:bodyPr>
+          <a:lstStyle/>
+          <a:p>
+            <a:r>
+              <a:rPr sz="1400" b="0" i="0">
                 <a:solidFill>
                   <a:srgbClr val="1A1A17"/>
                 </a:solidFill>
@@ -4826,22 +4826,22 @@
         </p:nvSpPr>
         <p:spPr>
           <a:xfrm>
-            <a:off x="548640" y="4540000"/>
-            <a:ext cx="11064240" cy="260000"/>
-          </a:xfrm>
-          <a:prstGeom prst="rect">
-            <a:avLst/>
-          </a:prstGeom>
-          <a:noFill/>
-        </p:spPr>
-        <p:txBody>
-          <a:bodyPr wrap="square">
-            <a:spAutoFit/>
-          </a:bodyPr>
-          <a:lstStyle/>
-          <a:p>
-            <a:r>
-              <a:rPr sz="1050" b="0" i="0">
+            <a:off x="548640" y="5615000"/>
+            <a:ext cx="11064240" cy="415000"/>
+          </a:xfrm>
+          <a:prstGeom prst="rect">
+            <a:avLst/>
+          </a:prstGeom>
+          <a:noFill/>
+        </p:spPr>
+        <p:txBody>
+          <a:bodyPr wrap="square">
+            <a:spAutoFit/>
+          </a:bodyPr>
+          <a:lstStyle/>
+          <a:p>
+            <a:r>
+              <a:rPr sz="1400" b="0" i="0">
                 <a:solidFill>
                   <a:srgbClr val="1A1A17"/>
                 </a:solidFill>
@@ -4860,22 +4860,22 @@
         </p:nvSpPr>
         <p:spPr>
           <a:xfrm>
-            <a:off x="548640" y="4775000"/>
-            <a:ext cx="11064240" cy="260000"/>
-          </a:xfrm>
-          <a:prstGeom prst="rect">
-            <a:avLst/>
-          </a:prstGeom>
-          <a:noFill/>
-        </p:spPr>
-        <p:txBody>
-          <a:bodyPr wrap="square">
-            <a:spAutoFit/>
-          </a:bodyPr>
-          <a:lstStyle/>
-          <a:p>
-            <a:r>
-              <a:rPr sz="1050" b="0" i="0">
+            <a:off x="548640" y="5915000"/>
+            <a:ext cx="11064240" cy="415000"/>
+          </a:xfrm>
+          <a:prstGeom prst="rect">
+            <a:avLst/>
+          </a:prstGeom>
+          <a:noFill/>
+        </p:spPr>
+        <p:txBody>
+          <a:bodyPr wrap="square">
+            <a:spAutoFit/>
+          </a:bodyPr>
+          <a:lstStyle/>
+          <a:p>
+            <a:r>
+              <a:rPr sz="1400" b="0" i="0">
                 <a:solidFill>
                   <a:srgbClr val="1A1A17"/>
                 </a:solidFill>
@@ -4894,22 +4894,22 @@
         </p:nvSpPr>
         <p:spPr>
           <a:xfrm>
-            <a:off x="548640" y="5010000"/>
-            <a:ext cx="11064240" cy="260000"/>
-          </a:xfrm>
-          <a:prstGeom prst="rect">
-            <a:avLst/>
-          </a:prstGeom>
-          <a:noFill/>
-        </p:spPr>
-        <p:txBody>
-          <a:bodyPr wrap="square">
-            <a:spAutoFit/>
-          </a:bodyPr>
-          <a:lstStyle/>
-          <a:p>
-            <a:r>
-              <a:rPr sz="1050" b="0" i="0">
+            <a:off x="548640" y="6215000"/>
+            <a:ext cx="11064240" cy="415000"/>
+          </a:xfrm>
+          <a:prstGeom prst="rect">
+            <a:avLst/>
+          </a:prstGeom>
+          <a:noFill/>
+        </p:spPr>
+        <p:txBody>
+          <a:bodyPr wrap="square">
+            <a:spAutoFit/>
+          </a:bodyPr>
+          <a:lstStyle/>
+          <a:p>
+            <a:r>
+              <a:rPr sz="1400" b="0" i="0">
                 <a:solidFill>
                   <a:srgbClr val="1A1A17"/>
                 </a:solidFill>
@@ -4954,22 +4954,22 @@
         </p:nvSpPr>
         <p:spPr>
           <a:xfrm>
-            <a:off x="548640" y="384048"/>
-            <a:ext cx="11064240" cy="365760"/>
-          </a:xfrm>
-          <a:prstGeom prst="rect">
-            <a:avLst/>
-          </a:prstGeom>
-          <a:noFill/>
-        </p:spPr>
-        <p:txBody>
-          <a:bodyPr wrap="square">
-            <a:spAutoFit/>
-          </a:bodyPr>
-          <a:lstStyle/>
-          <a:p>
-            <a:r>
-              <a:rPr sz="1250" b="1" i="0">
+            <a:off x="548640" y="365760"/>
+            <a:ext cx="11064240" cy="400000"/>
+          </a:xfrm>
+          <a:prstGeom prst="rect">
+            <a:avLst/>
+          </a:prstGeom>
+          <a:noFill/>
+        </p:spPr>
+        <p:txBody>
+          <a:bodyPr wrap="square">
+            <a:spAutoFit/>
+          </a:bodyPr>
+          <a:lstStyle/>
+          <a:p>
+            <a:r>
+              <a:rPr sz="1400" b="1" i="0">
                 <a:solidFill>
                   <a:srgbClr val="C8603A"/>
                 </a:solidFill>
@@ -4988,22 +4988,22 @@
         </p:nvSpPr>
         <p:spPr>
           <a:xfrm>
-            <a:off x="548640" y="658368"/>
-            <a:ext cx="11064240" cy="640080"/>
-          </a:xfrm>
-          <a:prstGeom prst="rect">
-            <a:avLst/>
-          </a:prstGeom>
-          <a:noFill/>
-        </p:spPr>
-        <p:txBody>
-          <a:bodyPr wrap="square">
-            <a:spAutoFit/>
-          </a:bodyPr>
-          <a:lstStyle/>
-          <a:p>
-            <a:r>
-              <a:rPr sz="2700" b="1" i="0">
+            <a:off x="548640" y="685800"/>
+            <a:ext cx="11064240" cy="820000"/>
+          </a:xfrm>
+          <a:prstGeom prst="rect">
+            <a:avLst/>
+          </a:prstGeom>
+          <a:noFill/>
+        </p:spPr>
+        <p:txBody>
+          <a:bodyPr wrap="square">
+            <a:spAutoFit/>
+          </a:bodyPr>
+          <a:lstStyle/>
+          <a:p>
+            <a:r>
+              <a:rPr sz="3300" b="1" i="0">
                 <a:solidFill>
                   <a:srgbClr val="1A1A17"/>
                 </a:solidFill>
@@ -5022,7 +5022,7 @@
         </p:nvSpPr>
         <p:spPr>
           <a:xfrm>
-            <a:off x="576072" y="1371600"/>
+            <a:off x="576072" y="1524000"/>
             <a:ext cx="713232" cy="38100"/>
           </a:xfrm>
           <a:prstGeom prst="roundRect">
@@ -5049,22 +5049,22 @@
         </p:nvSpPr>
         <p:spPr>
           <a:xfrm>
-            <a:off x="548640" y="1600000"/>
-            <a:ext cx="11064240" cy="400000"/>
-          </a:xfrm>
-          <a:prstGeom prst="rect">
-            <a:avLst/>
-          </a:prstGeom>
-          <a:noFill/>
-        </p:spPr>
-        <p:txBody>
-          <a:bodyPr wrap="square">
-            <a:spAutoFit/>
-          </a:bodyPr>
-          <a:lstStyle/>
-          <a:p>
-            <a:r>
-              <a:rPr sz="1500" b="0" i="0">
+            <a:off x="548640" y="2172500"/>
+            <a:ext cx="11064240" cy="862500"/>
+          </a:xfrm>
+          <a:prstGeom prst="rect">
+            <a:avLst/>
+          </a:prstGeom>
+          <a:noFill/>
+        </p:spPr>
+        <p:txBody>
+          <a:bodyPr wrap="square">
+            <a:spAutoFit/>
+          </a:bodyPr>
+          <a:lstStyle/>
+          <a:p>
+            <a:r>
+              <a:rPr sz="1850" b="0" i="0">
                 <a:solidFill>
                   <a:srgbClr val="5A5A52"/>
                 </a:solidFill>
@@ -5083,22 +5083,22 @@
         </p:nvSpPr>
         <p:spPr>
           <a:xfrm>
-            <a:off x="548640" y="2190000"/>
-            <a:ext cx="11064240" cy="260000"/>
-          </a:xfrm>
-          <a:prstGeom prst="rect">
-            <a:avLst/>
-          </a:prstGeom>
-          <a:noFill/>
-        </p:spPr>
-        <p:txBody>
-          <a:bodyPr wrap="square">
-            <a:spAutoFit/>
-          </a:bodyPr>
-          <a:lstStyle/>
-          <a:p>
-            <a:r>
-              <a:rPr sz="1050" b="0" i="0">
+            <a:off x="548640" y="2902500"/>
+            <a:ext cx="11064240" cy="702500"/>
+          </a:xfrm>
+          <a:prstGeom prst="rect">
+            <a:avLst/>
+          </a:prstGeom>
+          <a:noFill/>
+        </p:spPr>
+        <p:txBody>
+          <a:bodyPr wrap="square">
+            <a:spAutoFit/>
+          </a:bodyPr>
+          <a:lstStyle/>
+          <a:p>
+            <a:r>
+              <a:rPr sz="1400" b="0" i="0">
                 <a:solidFill>
                   <a:srgbClr val="1A1A17"/>
                 </a:solidFill>
@@ -5117,22 +5117,22 @@
         </p:nvSpPr>
         <p:spPr>
           <a:xfrm>
-            <a:off x="548640" y="2425000"/>
-            <a:ext cx="11064240" cy="260000"/>
-          </a:xfrm>
-          <a:prstGeom prst="rect">
-            <a:avLst/>
-          </a:prstGeom>
-          <a:noFill/>
-        </p:spPr>
-        <p:txBody>
-          <a:bodyPr wrap="square">
-            <a:spAutoFit/>
-          </a:bodyPr>
-          <a:lstStyle/>
-          <a:p>
-            <a:r>
-              <a:rPr sz="1050" b="0" i="0">
+            <a:off x="548640" y="3202500"/>
+            <a:ext cx="11064240" cy="702500"/>
+          </a:xfrm>
+          <a:prstGeom prst="rect">
+            <a:avLst/>
+          </a:prstGeom>
+          <a:noFill/>
+        </p:spPr>
+        <p:txBody>
+          <a:bodyPr wrap="square">
+            <a:spAutoFit/>
+          </a:bodyPr>
+          <a:lstStyle/>
+          <a:p>
+            <a:r>
+              <a:rPr sz="1400" b="0" i="0">
                 <a:solidFill>
                   <a:srgbClr val="1A1A17"/>
                 </a:solidFill>
@@ -5151,22 +5151,22 @@
         </p:nvSpPr>
         <p:spPr>
           <a:xfrm>
-            <a:off x="548640" y="2660000"/>
-            <a:ext cx="11064240" cy="260000"/>
-          </a:xfrm>
-          <a:prstGeom prst="rect">
-            <a:avLst/>
-          </a:prstGeom>
-          <a:noFill/>
-        </p:spPr>
-        <p:txBody>
-          <a:bodyPr wrap="square">
-            <a:spAutoFit/>
-          </a:bodyPr>
-          <a:lstStyle/>
-          <a:p>
-            <a:r>
-              <a:rPr sz="1050" b="0" i="0">
+            <a:off x="548640" y="3502500"/>
+            <a:ext cx="11064240" cy="702500"/>
+          </a:xfrm>
+          <a:prstGeom prst="rect">
+            <a:avLst/>
+          </a:prstGeom>
+          <a:noFill/>
+        </p:spPr>
+        <p:txBody>
+          <a:bodyPr wrap="square">
+            <a:spAutoFit/>
+          </a:bodyPr>
+          <a:lstStyle/>
+          <a:p>
+            <a:r>
+              <a:rPr sz="1400" b="0" i="0">
                 <a:solidFill>
                   <a:srgbClr val="1A1A17"/>
                 </a:solidFill>
@@ -5185,22 +5185,22 @@
         </p:nvSpPr>
         <p:spPr>
           <a:xfrm>
-            <a:off x="548640" y="2895000"/>
-            <a:ext cx="11064240" cy="260000"/>
-          </a:xfrm>
-          <a:prstGeom prst="rect">
-            <a:avLst/>
-          </a:prstGeom>
-          <a:noFill/>
-        </p:spPr>
-        <p:txBody>
-          <a:bodyPr wrap="square">
-            <a:spAutoFit/>
-          </a:bodyPr>
-          <a:lstStyle/>
-          <a:p>
-            <a:r>
-              <a:rPr sz="1050" b="0" i="0">
+            <a:off x="548640" y="3802500"/>
+            <a:ext cx="11064240" cy="702500"/>
+          </a:xfrm>
+          <a:prstGeom prst="rect">
+            <a:avLst/>
+          </a:prstGeom>
+          <a:noFill/>
+        </p:spPr>
+        <p:txBody>
+          <a:bodyPr wrap="square">
+            <a:spAutoFit/>
+          </a:bodyPr>
+          <a:lstStyle/>
+          <a:p>
+            <a:r>
+              <a:rPr sz="1400" b="0" i="0">
                 <a:solidFill>
                   <a:srgbClr val="1A1A17"/>
                 </a:solidFill>
@@ -5219,22 +5219,22 @@
         </p:nvSpPr>
         <p:spPr>
           <a:xfrm>
-            <a:off x="548640" y="3130000"/>
-            <a:ext cx="11064240" cy="260000"/>
-          </a:xfrm>
-          <a:prstGeom prst="rect">
-            <a:avLst/>
-          </a:prstGeom>
-          <a:noFill/>
-        </p:spPr>
-        <p:txBody>
-          <a:bodyPr wrap="square">
-            <a:spAutoFit/>
-          </a:bodyPr>
-          <a:lstStyle/>
-          <a:p>
-            <a:r>
-              <a:rPr sz="1050" b="0" i="0">
+            <a:off x="548640" y="4102500"/>
+            <a:ext cx="11064240" cy="702500"/>
+          </a:xfrm>
+          <a:prstGeom prst="rect">
+            <a:avLst/>
+          </a:prstGeom>
+          <a:noFill/>
+        </p:spPr>
+        <p:txBody>
+          <a:bodyPr wrap="square">
+            <a:spAutoFit/>
+          </a:bodyPr>
+          <a:lstStyle/>
+          <a:p>
+            <a:r>
+              <a:rPr sz="1400" b="0" i="0">
                 <a:solidFill>
                   <a:srgbClr val="1A1A17"/>
                 </a:solidFill>
@@ -5253,22 +5253,22 @@
         </p:nvSpPr>
         <p:spPr>
           <a:xfrm>
-            <a:off x="548640" y="3365000"/>
-            <a:ext cx="11064240" cy="260000"/>
-          </a:xfrm>
-          <a:prstGeom prst="rect">
-            <a:avLst/>
-          </a:prstGeom>
-          <a:noFill/>
-        </p:spPr>
-        <p:txBody>
-          <a:bodyPr wrap="square">
-            <a:spAutoFit/>
-          </a:bodyPr>
-          <a:lstStyle/>
-          <a:p>
-            <a:r>
-              <a:rPr sz="1050" b="0" i="0">
+            <a:off x="548640" y="4402500"/>
+            <a:ext cx="11064240" cy="702500"/>
+          </a:xfrm>
+          <a:prstGeom prst="rect">
+            <a:avLst/>
+          </a:prstGeom>
+          <a:noFill/>
+        </p:spPr>
+        <p:txBody>
+          <a:bodyPr wrap="square">
+            <a:spAutoFit/>
+          </a:bodyPr>
+          <a:lstStyle/>
+          <a:p>
+            <a:r>
+              <a:rPr sz="1400" b="0" i="0">
                 <a:solidFill>
                   <a:srgbClr val="1A1A17"/>
                 </a:solidFill>
@@ -5287,22 +5287,22 @@
         </p:nvSpPr>
         <p:spPr>
           <a:xfrm>
-            <a:off x="548640" y="3600000"/>
-            <a:ext cx="11064240" cy="260000"/>
-          </a:xfrm>
-          <a:prstGeom prst="rect">
-            <a:avLst/>
-          </a:prstGeom>
-          <a:noFill/>
-        </p:spPr>
-        <p:txBody>
-          <a:bodyPr wrap="square">
-            <a:spAutoFit/>
-          </a:bodyPr>
-          <a:lstStyle/>
-          <a:p>
-            <a:r>
-              <a:rPr sz="1050" b="0" i="0">
+            <a:off x="548640" y="4702500"/>
+            <a:ext cx="11064240" cy="702500"/>
+          </a:xfrm>
+          <a:prstGeom prst="rect">
+            <a:avLst/>
+          </a:prstGeom>
+          <a:noFill/>
+        </p:spPr>
+        <p:txBody>
+          <a:bodyPr wrap="square">
+            <a:spAutoFit/>
+          </a:bodyPr>
+          <a:lstStyle/>
+          <a:p>
+            <a:r>
+              <a:rPr sz="1400" b="0" i="0">
                 <a:solidFill>
                   <a:srgbClr val="1A1A17"/>
                 </a:solidFill>
@@ -5321,22 +5321,22 @@
         </p:nvSpPr>
         <p:spPr>
           <a:xfrm>
-            <a:off x="548640" y="3835000"/>
-            <a:ext cx="11064240" cy="260000"/>
-          </a:xfrm>
-          <a:prstGeom prst="rect">
-            <a:avLst/>
-          </a:prstGeom>
-          <a:noFill/>
-        </p:spPr>
-        <p:txBody>
-          <a:bodyPr wrap="square">
-            <a:spAutoFit/>
-          </a:bodyPr>
-          <a:lstStyle/>
-          <a:p>
-            <a:r>
-              <a:rPr sz="1050" b="0" i="0">
+            <a:off x="548640" y="5002500"/>
+            <a:ext cx="11064240" cy="702500"/>
+          </a:xfrm>
+          <a:prstGeom prst="rect">
+            <a:avLst/>
+          </a:prstGeom>
+          <a:noFill/>
+        </p:spPr>
+        <p:txBody>
+          <a:bodyPr wrap="square">
+            <a:spAutoFit/>
+          </a:bodyPr>
+          <a:lstStyle/>
+          <a:p>
+            <a:r>
+              <a:rPr sz="1400" b="0" i="0">
                 <a:solidFill>
                   <a:srgbClr val="1A1A17"/>
                 </a:solidFill>
@@ -5355,22 +5355,22 @@
         </p:nvSpPr>
         <p:spPr>
           <a:xfrm>
-            <a:off x="548640" y="4070000"/>
-            <a:ext cx="11064240" cy="260000"/>
-          </a:xfrm>
-          <a:prstGeom prst="rect">
-            <a:avLst/>
-          </a:prstGeom>
-          <a:noFill/>
-        </p:spPr>
-        <p:txBody>
-          <a:bodyPr wrap="square">
-            <a:spAutoFit/>
-          </a:bodyPr>
-          <a:lstStyle/>
-          <a:p>
-            <a:r>
-              <a:rPr sz="1050" b="0" i="0">
+            <a:off x="548640" y="5302500"/>
+            <a:ext cx="11064240" cy="702500"/>
+          </a:xfrm>
+          <a:prstGeom prst="rect">
+            <a:avLst/>
+          </a:prstGeom>
+          <a:noFill/>
+        </p:spPr>
+        <p:txBody>
+          <a:bodyPr wrap="square">
+            <a:spAutoFit/>
+          </a:bodyPr>
+          <a:lstStyle/>
+          <a:p>
+            <a:r>
+              <a:rPr sz="1400" b="0" i="0">
                 <a:solidFill>
                   <a:srgbClr val="1A1A17"/>
                 </a:solidFill>
@@ -5389,22 +5389,22 @@
         </p:nvSpPr>
         <p:spPr>
           <a:xfrm>
-            <a:off x="548640" y="4465000"/>
-            <a:ext cx="11064240" cy="340000"/>
-          </a:xfrm>
-          <a:prstGeom prst="rect">
-            <a:avLst/>
-          </a:prstGeom>
-          <a:noFill/>
-        </p:spPr>
-        <p:txBody>
-          <a:bodyPr wrap="square">
-            <a:spAutoFit/>
-          </a:bodyPr>
-          <a:lstStyle/>
-          <a:p>
-            <a:r>
-              <a:rPr sz="1400" b="1" i="0">
+            <a:off x="548640" y="5802500"/>
+            <a:ext cx="11064240" cy="802500"/>
+          </a:xfrm>
+          <a:prstGeom prst="rect">
+            <a:avLst/>
+          </a:prstGeom>
+          <a:noFill/>
+        </p:spPr>
+        <p:txBody>
+          <a:bodyPr wrap="square">
+            <a:spAutoFit/>
+          </a:bodyPr>
+          <a:lstStyle/>
+          <a:p>
+            <a:r>
+              <a:rPr sz="1750" b="1" i="0">
                 <a:solidFill>
                   <a:srgbClr val="C8603A"/>
                 </a:solidFill>
@@ -5449,22 +5449,22 @@
         </p:nvSpPr>
         <p:spPr>
           <a:xfrm>
-            <a:off x="548640" y="384048"/>
-            <a:ext cx="11064240" cy="365760"/>
-          </a:xfrm>
-          <a:prstGeom prst="rect">
-            <a:avLst/>
-          </a:prstGeom>
-          <a:noFill/>
-        </p:spPr>
-        <p:txBody>
-          <a:bodyPr wrap="square">
-            <a:spAutoFit/>
-          </a:bodyPr>
-          <a:lstStyle/>
-          <a:p>
-            <a:r>
-              <a:rPr sz="1250" b="1" i="0">
+            <a:off x="548640" y="365760"/>
+            <a:ext cx="11064240" cy="400000"/>
+          </a:xfrm>
+          <a:prstGeom prst="rect">
+            <a:avLst/>
+          </a:prstGeom>
+          <a:noFill/>
+        </p:spPr>
+        <p:txBody>
+          <a:bodyPr wrap="square">
+            <a:spAutoFit/>
+          </a:bodyPr>
+          <a:lstStyle/>
+          <a:p>
+            <a:r>
+              <a:rPr sz="1400" b="1" i="0">
                 <a:solidFill>
                   <a:srgbClr val="C8603A"/>
                 </a:solidFill>
@@ -5483,22 +5483,22 @@
         </p:nvSpPr>
         <p:spPr>
           <a:xfrm>
-            <a:off x="548640" y="658368"/>
-            <a:ext cx="11064240" cy="640080"/>
-          </a:xfrm>
-          <a:prstGeom prst="rect">
-            <a:avLst/>
-          </a:prstGeom>
-          <a:noFill/>
-        </p:spPr>
-        <p:txBody>
-          <a:bodyPr wrap="square">
-            <a:spAutoFit/>
-          </a:bodyPr>
-          <a:lstStyle/>
-          <a:p>
-            <a:r>
-              <a:rPr sz="2700" b="1" i="0">
+            <a:off x="548640" y="685800"/>
+            <a:ext cx="11064240" cy="820000"/>
+          </a:xfrm>
+          <a:prstGeom prst="rect">
+            <a:avLst/>
+          </a:prstGeom>
+          <a:noFill/>
+        </p:spPr>
+        <p:txBody>
+          <a:bodyPr wrap="square">
+            <a:spAutoFit/>
+          </a:bodyPr>
+          <a:lstStyle/>
+          <a:p>
+            <a:r>
+              <a:rPr sz="3300" b="1" i="0">
                 <a:solidFill>
                   <a:srgbClr val="1A1A17"/>
                 </a:solidFill>
@@ -5517,7 +5517,7 @@
         </p:nvSpPr>
         <p:spPr>
           <a:xfrm>
-            <a:off x="576072" y="1371600"/>
+            <a:off x="576072" y="1524000"/>
             <a:ext cx="713232" cy="38100"/>
           </a:xfrm>
           <a:prstGeom prst="roundRect">
@@ -5544,22 +5544,22 @@
         </p:nvSpPr>
         <p:spPr>
           <a:xfrm>
-            <a:off x="548640" y="1600000"/>
-            <a:ext cx="11064240" cy="400000"/>
-          </a:xfrm>
-          <a:prstGeom prst="rect">
-            <a:avLst/>
-          </a:prstGeom>
-          <a:noFill/>
-        </p:spPr>
-        <p:txBody>
-          <a:bodyPr wrap="square">
-            <a:spAutoFit/>
-          </a:bodyPr>
-          <a:lstStyle/>
-          <a:p>
-            <a:r>
-              <a:rPr sz="1500" b="0" i="0">
+            <a:off x="548640" y="2500000"/>
+            <a:ext cx="11064240" cy="1190000"/>
+          </a:xfrm>
+          <a:prstGeom prst="rect">
+            <a:avLst/>
+          </a:prstGeom>
+          <a:noFill/>
+        </p:spPr>
+        <p:txBody>
+          <a:bodyPr wrap="square">
+            <a:spAutoFit/>
+          </a:bodyPr>
+          <a:lstStyle/>
+          <a:p>
+            <a:r>
+              <a:rPr sz="1850" b="0" i="0">
                 <a:solidFill>
                   <a:srgbClr val="5A5A52"/>
                 </a:solidFill>
@@ -5578,22 +5578,22 @@
         </p:nvSpPr>
         <p:spPr>
           <a:xfrm>
-            <a:off x="548640" y="2190000"/>
-            <a:ext cx="11064240" cy="340000"/>
-          </a:xfrm>
-          <a:prstGeom prst="rect">
-            <a:avLst/>
-          </a:prstGeom>
-          <a:noFill/>
-        </p:spPr>
-        <p:txBody>
-          <a:bodyPr wrap="square">
-            <a:spAutoFit/>
-          </a:bodyPr>
-          <a:lstStyle/>
-          <a:p>
-            <a:r>
-              <a:rPr sz="1400" b="0" i="0">
+            <a:off x="548640" y="3230000"/>
+            <a:ext cx="11064240" cy="1130000"/>
+          </a:xfrm>
+          <a:prstGeom prst="rect">
+            <a:avLst/>
+          </a:prstGeom>
+          <a:noFill/>
+        </p:spPr>
+        <p:txBody>
+          <a:bodyPr wrap="square">
+            <a:spAutoFit/>
+          </a:bodyPr>
+          <a:lstStyle/>
+          <a:p>
+            <a:r>
+              <a:rPr sz="1750" b="0" i="0">
                 <a:solidFill>
                   <a:srgbClr val="1A1A17"/>
                 </a:solidFill>
@@ -5612,22 +5612,22 @@
         </p:nvSpPr>
         <p:spPr>
           <a:xfrm>
-            <a:off x="548640" y="2520000"/>
-            <a:ext cx="11064240" cy="340000"/>
-          </a:xfrm>
-          <a:prstGeom prst="rect">
-            <a:avLst/>
-          </a:prstGeom>
-          <a:noFill/>
-        </p:spPr>
-        <p:txBody>
-          <a:bodyPr wrap="square">
-            <a:spAutoFit/>
-          </a:bodyPr>
-          <a:lstStyle/>
-          <a:p>
-            <a:r>
-              <a:rPr sz="1400" b="0" i="0">
+            <a:off x="548640" y="3645000"/>
+            <a:ext cx="11064240" cy="1130000"/>
+          </a:xfrm>
+          <a:prstGeom prst="rect">
+            <a:avLst/>
+          </a:prstGeom>
+          <a:noFill/>
+        </p:spPr>
+        <p:txBody>
+          <a:bodyPr wrap="square">
+            <a:spAutoFit/>
+          </a:bodyPr>
+          <a:lstStyle/>
+          <a:p>
+            <a:r>
+              <a:rPr sz="1750" b="0" i="0">
                 <a:solidFill>
                   <a:srgbClr val="1A1A17"/>
                 </a:solidFill>
@@ -5646,22 +5646,22 @@
         </p:nvSpPr>
         <p:spPr>
           <a:xfrm>
-            <a:off x="548640" y="2850000"/>
-            <a:ext cx="11064240" cy="340000"/>
-          </a:xfrm>
-          <a:prstGeom prst="rect">
-            <a:avLst/>
-          </a:prstGeom>
-          <a:noFill/>
-        </p:spPr>
-        <p:txBody>
-          <a:bodyPr wrap="square">
-            <a:spAutoFit/>
-          </a:bodyPr>
-          <a:lstStyle/>
-          <a:p>
-            <a:r>
-              <a:rPr sz="1400" b="0" i="0">
+            <a:off x="548640" y="4060000"/>
+            <a:ext cx="11064240" cy="1130000"/>
+          </a:xfrm>
+          <a:prstGeom prst="rect">
+            <a:avLst/>
+          </a:prstGeom>
+          <a:noFill/>
+        </p:spPr>
+        <p:txBody>
+          <a:bodyPr wrap="square">
+            <a:spAutoFit/>
+          </a:bodyPr>
+          <a:lstStyle/>
+          <a:p>
+            <a:r>
+              <a:rPr sz="1750" b="0" i="0">
                 <a:solidFill>
                   <a:srgbClr val="1A1A17"/>
                 </a:solidFill>
@@ -5680,22 +5680,22 @@
         </p:nvSpPr>
         <p:spPr>
           <a:xfrm>
-            <a:off x="548640" y="3340000"/>
-            <a:ext cx="11064240" cy="340000"/>
-          </a:xfrm>
-          <a:prstGeom prst="rect">
-            <a:avLst/>
-          </a:prstGeom>
-          <a:noFill/>
-        </p:spPr>
-        <p:txBody>
-          <a:bodyPr wrap="square">
-            <a:spAutoFit/>
-          </a:bodyPr>
-          <a:lstStyle/>
-          <a:p>
-            <a:r>
-              <a:rPr sz="1400" b="1" i="0">
+            <a:off x="548640" y="4675000"/>
+            <a:ext cx="11064240" cy="1130000"/>
+          </a:xfrm>
+          <a:prstGeom prst="rect">
+            <a:avLst/>
+          </a:prstGeom>
+          <a:noFill/>
+        </p:spPr>
+        <p:txBody>
+          <a:bodyPr wrap="square">
+            <a:spAutoFit/>
+          </a:bodyPr>
+          <a:lstStyle/>
+          <a:p>
+            <a:r>
+              <a:rPr sz="1750" b="1" i="0">
                 <a:solidFill>
                   <a:srgbClr val="B3261E"/>
                 </a:solidFill>
@@ -5740,22 +5740,22 @@
         </p:nvSpPr>
         <p:spPr>
           <a:xfrm>
-            <a:off x="548640" y="384048"/>
-            <a:ext cx="11064240" cy="365760"/>
-          </a:xfrm>
-          <a:prstGeom prst="rect">
-            <a:avLst/>
-          </a:prstGeom>
-          <a:noFill/>
-        </p:spPr>
-        <p:txBody>
-          <a:bodyPr wrap="square">
-            <a:spAutoFit/>
-          </a:bodyPr>
-          <a:lstStyle/>
-          <a:p>
-            <a:r>
-              <a:rPr sz="1250" b="1" i="0">
+            <a:off x="548640" y="365760"/>
+            <a:ext cx="11064240" cy="400000"/>
+          </a:xfrm>
+          <a:prstGeom prst="rect">
+            <a:avLst/>
+          </a:prstGeom>
+          <a:noFill/>
+        </p:spPr>
+        <p:txBody>
+          <a:bodyPr wrap="square">
+            <a:spAutoFit/>
+          </a:bodyPr>
+          <a:lstStyle/>
+          <a:p>
+            <a:r>
+              <a:rPr sz="1400" b="1" i="0">
                 <a:solidFill>
                   <a:srgbClr val="C8603A"/>
                 </a:solidFill>
@@ -5774,22 +5774,22 @@
         </p:nvSpPr>
         <p:spPr>
           <a:xfrm>
-            <a:off x="548640" y="658368"/>
-            <a:ext cx="11064240" cy="640080"/>
-          </a:xfrm>
-          <a:prstGeom prst="rect">
-            <a:avLst/>
-          </a:prstGeom>
-          <a:noFill/>
-        </p:spPr>
-        <p:txBody>
-          <a:bodyPr wrap="square">
-            <a:spAutoFit/>
-          </a:bodyPr>
-          <a:lstStyle/>
-          <a:p>
-            <a:r>
-              <a:rPr sz="2700" b="1" i="0">
+            <a:off x="548640" y="685800"/>
+            <a:ext cx="11064240" cy="820000"/>
+          </a:xfrm>
+          <a:prstGeom prst="rect">
+            <a:avLst/>
+          </a:prstGeom>
+          <a:noFill/>
+        </p:spPr>
+        <p:txBody>
+          <a:bodyPr wrap="square">
+            <a:spAutoFit/>
+          </a:bodyPr>
+          <a:lstStyle/>
+          <a:p>
+            <a:r>
+              <a:rPr sz="3300" b="1" i="0">
                 <a:solidFill>
                   <a:srgbClr val="1A1A17"/>
                 </a:solidFill>
@@ -5808,7 +5808,7 @@
         </p:nvSpPr>
         <p:spPr>
           <a:xfrm>
-            <a:off x="576072" y="1371600"/>
+            <a:off x="576072" y="1524000"/>
             <a:ext cx="713232" cy="38100"/>
           </a:xfrm>
           <a:prstGeom prst="roundRect">
@@ -5835,22 +5835,22 @@
         </p:nvSpPr>
         <p:spPr>
           <a:xfrm>
-            <a:off x="548640" y="1600000"/>
-            <a:ext cx="11064240" cy="400000"/>
-          </a:xfrm>
-          <a:prstGeom prst="rect">
-            <a:avLst/>
-          </a:prstGeom>
-          <a:noFill/>
-        </p:spPr>
-        <p:txBody>
-          <a:bodyPr wrap="square">
-            <a:spAutoFit/>
-          </a:bodyPr>
-          <a:lstStyle/>
-          <a:p>
-            <a:r>
-              <a:rPr sz="1500" b="0" i="0">
+            <a:off x="548640" y="2500000"/>
+            <a:ext cx="11064240" cy="1190000"/>
+          </a:xfrm>
+          <a:prstGeom prst="rect">
+            <a:avLst/>
+          </a:prstGeom>
+          <a:noFill/>
+        </p:spPr>
+        <p:txBody>
+          <a:bodyPr wrap="square">
+            <a:spAutoFit/>
+          </a:bodyPr>
+          <a:lstStyle/>
+          <a:p>
+            <a:r>
+              <a:rPr sz="1850" b="0" i="0">
                 <a:solidFill>
                   <a:srgbClr val="5A5A52"/>
                 </a:solidFill>
@@ -5869,22 +5869,22 @@
         </p:nvSpPr>
         <p:spPr>
           <a:xfrm>
-            <a:off x="548640" y="2190000"/>
-            <a:ext cx="11064240" cy="340000"/>
-          </a:xfrm>
-          <a:prstGeom prst="rect">
-            <a:avLst/>
-          </a:prstGeom>
-          <a:noFill/>
-        </p:spPr>
-        <p:txBody>
-          <a:bodyPr wrap="square">
-            <a:spAutoFit/>
-          </a:bodyPr>
-          <a:lstStyle/>
-          <a:p>
-            <a:r>
-              <a:rPr sz="1400" b="0" i="0">
+            <a:off x="548640" y="3230000"/>
+            <a:ext cx="11064240" cy="1130000"/>
+          </a:xfrm>
+          <a:prstGeom prst="rect">
+            <a:avLst/>
+          </a:prstGeom>
+          <a:noFill/>
+        </p:spPr>
+        <p:txBody>
+          <a:bodyPr wrap="square">
+            <a:spAutoFit/>
+          </a:bodyPr>
+          <a:lstStyle/>
+          <a:p>
+            <a:r>
+              <a:rPr sz="1750" b="0" i="0">
                 <a:solidFill>
                   <a:srgbClr val="1A1A17"/>
                 </a:solidFill>
@@ -5903,22 +5903,22 @@
         </p:nvSpPr>
         <p:spPr>
           <a:xfrm>
-            <a:off x="548640" y="2520000"/>
-            <a:ext cx="11064240" cy="340000"/>
-          </a:xfrm>
-          <a:prstGeom prst="rect">
-            <a:avLst/>
-          </a:prstGeom>
-          <a:noFill/>
-        </p:spPr>
-        <p:txBody>
-          <a:bodyPr wrap="square">
-            <a:spAutoFit/>
-          </a:bodyPr>
-          <a:lstStyle/>
-          <a:p>
-            <a:r>
-              <a:rPr sz="1400" b="0" i="0">
+            <a:off x="548640" y="3645000"/>
+            <a:ext cx="11064240" cy="1130000"/>
+          </a:xfrm>
+          <a:prstGeom prst="rect">
+            <a:avLst/>
+          </a:prstGeom>
+          <a:noFill/>
+        </p:spPr>
+        <p:txBody>
+          <a:bodyPr wrap="square">
+            <a:spAutoFit/>
+          </a:bodyPr>
+          <a:lstStyle/>
+          <a:p>
+            <a:r>
+              <a:rPr sz="1750" b="0" i="0">
                 <a:solidFill>
                   <a:srgbClr val="1A1A17"/>
                 </a:solidFill>
@@ -5937,22 +5937,22 @@
         </p:nvSpPr>
         <p:spPr>
           <a:xfrm>
-            <a:off x="548640" y="2850000"/>
-            <a:ext cx="11064240" cy="340000"/>
-          </a:xfrm>
-          <a:prstGeom prst="rect">
-            <a:avLst/>
-          </a:prstGeom>
-          <a:noFill/>
-        </p:spPr>
-        <p:txBody>
-          <a:bodyPr wrap="square">
-            <a:spAutoFit/>
-          </a:bodyPr>
-          <a:lstStyle/>
-          <a:p>
-            <a:r>
-              <a:rPr sz="1400" b="0" i="0">
+            <a:off x="548640" y="4060000"/>
+            <a:ext cx="11064240" cy="1130000"/>
+          </a:xfrm>
+          <a:prstGeom prst="rect">
+            <a:avLst/>
+          </a:prstGeom>
+          <a:noFill/>
+        </p:spPr>
+        <p:txBody>
+          <a:bodyPr wrap="square">
+            <a:spAutoFit/>
+          </a:bodyPr>
+          <a:lstStyle/>
+          <a:p>
+            <a:r>
+              <a:rPr sz="1750" b="0" i="0">
                 <a:solidFill>
                   <a:srgbClr val="1A1A17"/>
                 </a:solidFill>
@@ -5971,22 +5971,22 @@
         </p:nvSpPr>
         <p:spPr>
           <a:xfrm>
-            <a:off x="548640" y="3180000"/>
-            <a:ext cx="11064240" cy="340000"/>
-          </a:xfrm>
-          <a:prstGeom prst="rect">
-            <a:avLst/>
-          </a:prstGeom>
-          <a:noFill/>
-        </p:spPr>
-        <p:txBody>
-          <a:bodyPr wrap="square">
-            <a:spAutoFit/>
-          </a:bodyPr>
-          <a:lstStyle/>
-          <a:p>
-            <a:r>
-              <a:rPr sz="1400" b="0" i="0">
+            <a:off x="548640" y="4475000"/>
+            <a:ext cx="11064240" cy="1130000"/>
+          </a:xfrm>
+          <a:prstGeom prst="rect">
+            <a:avLst/>
+          </a:prstGeom>
+          <a:noFill/>
+        </p:spPr>
+        <p:txBody>
+          <a:bodyPr wrap="square">
+            <a:spAutoFit/>
+          </a:bodyPr>
+          <a:lstStyle/>
+          <a:p>
+            <a:r>
+              <a:rPr sz="1750" b="0" i="0">
                 <a:solidFill>
                   <a:srgbClr val="1A1A17"/>
                 </a:solidFill>
@@ -6031,22 +6031,22 @@
         </p:nvSpPr>
         <p:spPr>
           <a:xfrm>
-            <a:off x="548640" y="384048"/>
-            <a:ext cx="11064240" cy="365760"/>
-          </a:xfrm>
-          <a:prstGeom prst="rect">
-            <a:avLst/>
-          </a:prstGeom>
-          <a:noFill/>
-        </p:spPr>
-        <p:txBody>
-          <a:bodyPr wrap="square">
-            <a:spAutoFit/>
-          </a:bodyPr>
-          <a:lstStyle/>
-          <a:p>
-            <a:r>
-              <a:rPr sz="1250" b="1" i="0">
+            <a:off x="548640" y="365760"/>
+            <a:ext cx="11064240" cy="400000"/>
+          </a:xfrm>
+          <a:prstGeom prst="rect">
+            <a:avLst/>
+          </a:prstGeom>
+          <a:noFill/>
+        </p:spPr>
+        <p:txBody>
+          <a:bodyPr wrap="square">
+            <a:spAutoFit/>
+          </a:bodyPr>
+          <a:lstStyle/>
+          <a:p>
+            <a:r>
+              <a:rPr sz="1400" b="1" i="0">
                 <a:solidFill>
                   <a:srgbClr val="C8603A"/>
                 </a:solidFill>
@@ -6065,22 +6065,22 @@
         </p:nvSpPr>
         <p:spPr>
           <a:xfrm>
-            <a:off x="548640" y="658368"/>
-            <a:ext cx="11064240" cy="640080"/>
-          </a:xfrm>
-          <a:prstGeom prst="rect">
-            <a:avLst/>
-          </a:prstGeom>
-          <a:noFill/>
-        </p:spPr>
-        <p:txBody>
-          <a:bodyPr wrap="square">
-            <a:spAutoFit/>
-          </a:bodyPr>
-          <a:lstStyle/>
-          <a:p>
-            <a:r>
-              <a:rPr sz="2700" b="1" i="0">
+            <a:off x="548640" y="685800"/>
+            <a:ext cx="11064240" cy="820000"/>
+          </a:xfrm>
+          <a:prstGeom prst="rect">
+            <a:avLst/>
+          </a:prstGeom>
+          <a:noFill/>
+        </p:spPr>
+        <p:txBody>
+          <a:bodyPr wrap="square">
+            <a:spAutoFit/>
+          </a:bodyPr>
+          <a:lstStyle/>
+          <a:p>
+            <a:r>
+              <a:rPr sz="3300" b="1" i="0">
                 <a:solidFill>
                   <a:srgbClr val="1A1A17"/>
                 </a:solidFill>
@@ -6099,7 +6099,7 @@
         </p:nvSpPr>
         <p:spPr>
           <a:xfrm>
-            <a:off x="576072" y="1371600"/>
+            <a:off x="576072" y="1524000"/>
             <a:ext cx="713232" cy="38100"/>
           </a:xfrm>
           <a:prstGeom prst="roundRect">
@@ -6126,22 +6126,22 @@
         </p:nvSpPr>
         <p:spPr>
           <a:xfrm>
-            <a:off x="548640" y="1600000"/>
-            <a:ext cx="11064240" cy="400000"/>
-          </a:xfrm>
-          <a:prstGeom prst="rect">
-            <a:avLst/>
-          </a:prstGeom>
-          <a:noFill/>
-        </p:spPr>
-        <p:txBody>
-          <a:bodyPr wrap="square">
-            <a:spAutoFit/>
-          </a:bodyPr>
-          <a:lstStyle/>
-          <a:p>
-            <a:r>
-              <a:rPr sz="1500" b="0" i="0">
+            <a:off x="548640" y="2500000"/>
+            <a:ext cx="11064240" cy="1190000"/>
+          </a:xfrm>
+          <a:prstGeom prst="rect">
+            <a:avLst/>
+          </a:prstGeom>
+          <a:noFill/>
+        </p:spPr>
+        <p:txBody>
+          <a:bodyPr wrap="square">
+            <a:spAutoFit/>
+          </a:bodyPr>
+          <a:lstStyle/>
+          <a:p>
+            <a:r>
+              <a:rPr sz="1850" b="0" i="0">
                 <a:solidFill>
                   <a:srgbClr val="5A5A52"/>
                 </a:solidFill>
@@ -6160,22 +6160,22 @@
         </p:nvSpPr>
         <p:spPr>
           <a:xfrm>
-            <a:off x="548640" y="2190000"/>
-            <a:ext cx="11064240" cy="260000"/>
-          </a:xfrm>
-          <a:prstGeom prst="rect">
-            <a:avLst/>
-          </a:prstGeom>
-          <a:noFill/>
-        </p:spPr>
-        <p:txBody>
-          <a:bodyPr wrap="square">
-            <a:spAutoFit/>
-          </a:bodyPr>
-          <a:lstStyle/>
-          <a:p>
-            <a:r>
-              <a:rPr sz="1050" b="0" i="0">
+            <a:off x="548640" y="3230000"/>
+            <a:ext cx="11064240" cy="1030000"/>
+          </a:xfrm>
+          <a:prstGeom prst="rect">
+            <a:avLst/>
+          </a:prstGeom>
+          <a:noFill/>
+        </p:spPr>
+        <p:txBody>
+          <a:bodyPr wrap="square">
+            <a:spAutoFit/>
+          </a:bodyPr>
+          <a:lstStyle/>
+          <a:p>
+            <a:r>
+              <a:rPr sz="1400" b="0" i="0">
                 <a:solidFill>
                   <a:srgbClr val="1A1A17"/>
                 </a:solidFill>
@@ -6194,22 +6194,22 @@
         </p:nvSpPr>
         <p:spPr>
           <a:xfrm>
-            <a:off x="548640" y="2425000"/>
-            <a:ext cx="11064240" cy="260000"/>
-          </a:xfrm>
-          <a:prstGeom prst="rect">
-            <a:avLst/>
-          </a:prstGeom>
-          <a:noFill/>
-        </p:spPr>
-        <p:txBody>
-          <a:bodyPr wrap="square">
-            <a:spAutoFit/>
-          </a:bodyPr>
-          <a:lstStyle/>
-          <a:p>
-            <a:r>
-              <a:rPr sz="1050" b="0" i="0">
+            <a:off x="548640" y="3530000"/>
+            <a:ext cx="11064240" cy="1030000"/>
+          </a:xfrm>
+          <a:prstGeom prst="rect">
+            <a:avLst/>
+          </a:prstGeom>
+          <a:noFill/>
+        </p:spPr>
+        <p:txBody>
+          <a:bodyPr wrap="square">
+            <a:spAutoFit/>
+          </a:bodyPr>
+          <a:lstStyle/>
+          <a:p>
+            <a:r>
+              <a:rPr sz="1400" b="0" i="0">
                 <a:solidFill>
                   <a:srgbClr val="1A1A17"/>
                 </a:solidFill>
@@ -6228,22 +6228,22 @@
         </p:nvSpPr>
         <p:spPr>
           <a:xfrm>
-            <a:off x="548640" y="2660000"/>
-            <a:ext cx="11064240" cy="260000"/>
-          </a:xfrm>
-          <a:prstGeom prst="rect">
-            <a:avLst/>
-          </a:prstGeom>
-          <a:noFill/>
-        </p:spPr>
-        <p:txBody>
-          <a:bodyPr wrap="square">
-            <a:spAutoFit/>
-          </a:bodyPr>
-          <a:lstStyle/>
-          <a:p>
-            <a:r>
-              <a:rPr sz="1050" b="0" i="0">
+            <a:off x="548640" y="3830000"/>
+            <a:ext cx="11064240" cy="1030000"/>
+          </a:xfrm>
+          <a:prstGeom prst="rect">
+            <a:avLst/>
+          </a:prstGeom>
+          <a:noFill/>
+        </p:spPr>
+        <p:txBody>
+          <a:bodyPr wrap="square">
+            <a:spAutoFit/>
+          </a:bodyPr>
+          <a:lstStyle/>
+          <a:p>
+            <a:r>
+              <a:rPr sz="1400" b="0" i="0">
                 <a:solidFill>
                   <a:srgbClr val="1A1A17"/>
                 </a:solidFill>
@@ -6262,22 +6262,22 @@
         </p:nvSpPr>
         <p:spPr>
           <a:xfrm>
-            <a:off x="548640" y="2895000"/>
-            <a:ext cx="11064240" cy="260000"/>
-          </a:xfrm>
-          <a:prstGeom prst="rect">
-            <a:avLst/>
-          </a:prstGeom>
-          <a:noFill/>
-        </p:spPr>
-        <p:txBody>
-          <a:bodyPr wrap="square">
-            <a:spAutoFit/>
-          </a:bodyPr>
-          <a:lstStyle/>
-          <a:p>
-            <a:r>
-              <a:rPr sz="1050" b="0" i="0">
+            <a:off x="548640" y="4130000"/>
+            <a:ext cx="11064240" cy="1030000"/>
+          </a:xfrm>
+          <a:prstGeom prst="rect">
+            <a:avLst/>
+          </a:prstGeom>
+          <a:noFill/>
+        </p:spPr>
+        <p:txBody>
+          <a:bodyPr wrap="square">
+            <a:spAutoFit/>
+          </a:bodyPr>
+          <a:lstStyle/>
+          <a:p>
+            <a:r>
+              <a:rPr sz="1400" b="0" i="0">
                 <a:solidFill>
                   <a:srgbClr val="1A1A17"/>
                 </a:solidFill>
@@ -6296,22 +6296,22 @@
         </p:nvSpPr>
         <p:spPr>
           <a:xfrm>
-            <a:off x="548640" y="3130000"/>
-            <a:ext cx="11064240" cy="260000"/>
-          </a:xfrm>
-          <a:prstGeom prst="rect">
-            <a:avLst/>
-          </a:prstGeom>
-          <a:noFill/>
-        </p:spPr>
-        <p:txBody>
-          <a:bodyPr wrap="square">
-            <a:spAutoFit/>
-          </a:bodyPr>
-          <a:lstStyle/>
-          <a:p>
-            <a:r>
-              <a:rPr sz="1050" b="0" i="0">
+            <a:off x="548640" y="4430000"/>
+            <a:ext cx="11064240" cy="1030000"/>
+          </a:xfrm>
+          <a:prstGeom prst="rect">
+            <a:avLst/>
+          </a:prstGeom>
+          <a:noFill/>
+        </p:spPr>
+        <p:txBody>
+          <a:bodyPr wrap="square">
+            <a:spAutoFit/>
+          </a:bodyPr>
+          <a:lstStyle/>
+          <a:p>
+            <a:r>
+              <a:rPr sz="1400" b="0" i="0">
                 <a:solidFill>
                   <a:srgbClr val="1A1A17"/>
                 </a:solidFill>
@@ -6330,22 +6330,22 @@
         </p:nvSpPr>
         <p:spPr>
           <a:xfrm>
-            <a:off x="548640" y="3365000"/>
-            <a:ext cx="11064240" cy="260000"/>
-          </a:xfrm>
-          <a:prstGeom prst="rect">
-            <a:avLst/>
-          </a:prstGeom>
-          <a:noFill/>
-        </p:spPr>
-        <p:txBody>
-          <a:bodyPr wrap="square">
-            <a:spAutoFit/>
-          </a:bodyPr>
-          <a:lstStyle/>
-          <a:p>
-            <a:r>
-              <a:rPr sz="1050" b="0" i="0">
+            <a:off x="548640" y="4730000"/>
+            <a:ext cx="11064240" cy="1030000"/>
+          </a:xfrm>
+          <a:prstGeom prst="rect">
+            <a:avLst/>
+          </a:prstGeom>
+          <a:noFill/>
+        </p:spPr>
+        <p:txBody>
+          <a:bodyPr wrap="square">
+            <a:spAutoFit/>
+          </a:bodyPr>
+          <a:lstStyle/>
+          <a:p>
+            <a:r>
+              <a:rPr sz="1400" b="0" i="0">
                 <a:solidFill>
                   <a:srgbClr val="1A1A17"/>
                 </a:solidFill>
@@ -6364,22 +6364,22 @@
         </p:nvSpPr>
         <p:spPr>
           <a:xfrm>
-            <a:off x="548640" y="3600000"/>
-            <a:ext cx="11064240" cy="260000"/>
-          </a:xfrm>
-          <a:prstGeom prst="rect">
-            <a:avLst/>
-          </a:prstGeom>
-          <a:noFill/>
-        </p:spPr>
-        <p:txBody>
-          <a:bodyPr wrap="square">
-            <a:spAutoFit/>
-          </a:bodyPr>
-          <a:lstStyle/>
-          <a:p>
-            <a:r>
-              <a:rPr sz="1050" b="0" i="0">
+            <a:off x="548640" y="5030000"/>
+            <a:ext cx="11064240" cy="1030000"/>
+          </a:xfrm>
+          <a:prstGeom prst="rect">
+            <a:avLst/>
+          </a:prstGeom>
+          <a:noFill/>
+        </p:spPr>
+        <p:txBody>
+          <a:bodyPr wrap="square">
+            <a:spAutoFit/>
+          </a:bodyPr>
+          <a:lstStyle/>
+          <a:p>
+            <a:r>
+              <a:rPr sz="1400" b="0" i="0">
                 <a:solidFill>
                   <a:srgbClr val="1A1A17"/>
                 </a:solidFill>
@@ -6398,22 +6398,22 @@
         </p:nvSpPr>
         <p:spPr>
           <a:xfrm>
-            <a:off x="548640" y="3835000"/>
-            <a:ext cx="11064240" cy="260000"/>
-          </a:xfrm>
-          <a:prstGeom prst="rect">
-            <a:avLst/>
-          </a:prstGeom>
-          <a:noFill/>
-        </p:spPr>
-        <p:txBody>
-          <a:bodyPr wrap="square">
-            <a:spAutoFit/>
-          </a:bodyPr>
-          <a:lstStyle/>
-          <a:p>
-            <a:r>
-              <a:rPr sz="1050" b="0" i="0">
+            <a:off x="548640" y="5330000"/>
+            <a:ext cx="11064240" cy="1030000"/>
+          </a:xfrm>
+          <a:prstGeom prst="rect">
+            <a:avLst/>
+          </a:prstGeom>
+          <a:noFill/>
+        </p:spPr>
+        <p:txBody>
+          <a:bodyPr wrap="square">
+            <a:spAutoFit/>
+          </a:bodyPr>
+          <a:lstStyle/>
+          <a:p>
+            <a:r>
+              <a:rPr sz="1400" b="0" i="0">
                 <a:solidFill>
                   <a:srgbClr val="1A1A17"/>
                 </a:solidFill>
@@ -6458,22 +6458,22 @@
         </p:nvSpPr>
         <p:spPr>
           <a:xfrm>
-            <a:off x="548640" y="384048"/>
-            <a:ext cx="11064240" cy="365760"/>
-          </a:xfrm>
-          <a:prstGeom prst="rect">
-            <a:avLst/>
-          </a:prstGeom>
-          <a:noFill/>
-        </p:spPr>
-        <p:txBody>
-          <a:bodyPr wrap="square">
-            <a:spAutoFit/>
-          </a:bodyPr>
-          <a:lstStyle/>
-          <a:p>
-            <a:r>
-              <a:rPr sz="1250" b="1" i="0">
+            <a:off x="548640" y="365760"/>
+            <a:ext cx="11064240" cy="400000"/>
+          </a:xfrm>
+          <a:prstGeom prst="rect">
+            <a:avLst/>
+          </a:prstGeom>
+          <a:noFill/>
+        </p:spPr>
+        <p:txBody>
+          <a:bodyPr wrap="square">
+            <a:spAutoFit/>
+          </a:bodyPr>
+          <a:lstStyle/>
+          <a:p>
+            <a:r>
+              <a:rPr sz="1400" b="1" i="0">
                 <a:solidFill>
                   <a:srgbClr val="C8603A"/>
                 </a:solidFill>
@@ -6492,22 +6492,22 @@
         </p:nvSpPr>
         <p:spPr>
           <a:xfrm>
-            <a:off x="548640" y="658368"/>
-            <a:ext cx="11064240" cy="640080"/>
-          </a:xfrm>
-          <a:prstGeom prst="rect">
-            <a:avLst/>
-          </a:prstGeom>
-          <a:noFill/>
-        </p:spPr>
-        <p:txBody>
-          <a:bodyPr wrap="square">
-            <a:spAutoFit/>
-          </a:bodyPr>
-          <a:lstStyle/>
-          <a:p>
-            <a:r>
-              <a:rPr sz="2700" b="1" i="0">
+            <a:off x="548640" y="685800"/>
+            <a:ext cx="11064240" cy="820000"/>
+          </a:xfrm>
+          <a:prstGeom prst="rect">
+            <a:avLst/>
+          </a:prstGeom>
+          <a:noFill/>
+        </p:spPr>
+        <p:txBody>
+          <a:bodyPr wrap="square">
+            <a:spAutoFit/>
+          </a:bodyPr>
+          <a:lstStyle/>
+          <a:p>
+            <a:r>
+              <a:rPr sz="3300" b="1" i="0">
                 <a:solidFill>
                   <a:srgbClr val="1A1A17"/>
                 </a:solidFill>
@@ -6526,7 +6526,7 @@
         </p:nvSpPr>
         <p:spPr>
           <a:xfrm>
-            <a:off x="576072" y="1371600"/>
+            <a:off x="576072" y="1524000"/>
             <a:ext cx="713232" cy="38100"/>
           </a:xfrm>
           <a:prstGeom prst="roundRect">
@@ -6553,22 +6553,22 @@
         </p:nvSpPr>
         <p:spPr>
           <a:xfrm>
-            <a:off x="548640" y="1600000"/>
-            <a:ext cx="11064240" cy="400000"/>
-          </a:xfrm>
-          <a:prstGeom prst="rect">
-            <a:avLst/>
-          </a:prstGeom>
-          <a:noFill/>
-        </p:spPr>
-        <p:txBody>
-          <a:bodyPr wrap="square">
-            <a:spAutoFit/>
-          </a:bodyPr>
-          <a:lstStyle/>
-          <a:p>
-            <a:r>
-              <a:rPr sz="1500" b="0" i="0">
+            <a:off x="548640" y="2500000"/>
+            <a:ext cx="11064240" cy="1190000"/>
+          </a:xfrm>
+          <a:prstGeom prst="rect">
+            <a:avLst/>
+          </a:prstGeom>
+          <a:noFill/>
+        </p:spPr>
+        <p:txBody>
+          <a:bodyPr wrap="square">
+            <a:spAutoFit/>
+          </a:bodyPr>
+          <a:lstStyle/>
+          <a:p>
+            <a:r>
+              <a:rPr sz="1850" b="0" i="0">
                 <a:solidFill>
                   <a:srgbClr val="5A5A52"/>
                 </a:solidFill>
@@ -6587,22 +6587,22 @@
         </p:nvSpPr>
         <p:spPr>
           <a:xfrm>
-            <a:off x="548640" y="2190000"/>
-            <a:ext cx="11064240" cy="340000"/>
-          </a:xfrm>
-          <a:prstGeom prst="rect">
-            <a:avLst/>
-          </a:prstGeom>
-          <a:noFill/>
-        </p:spPr>
-        <p:txBody>
-          <a:bodyPr wrap="square">
-            <a:spAutoFit/>
-          </a:bodyPr>
-          <a:lstStyle/>
-          <a:p>
-            <a:r>
-              <a:rPr sz="1400" b="1" i="0">
+            <a:off x="548640" y="3230000"/>
+            <a:ext cx="11064240" cy="1130000"/>
+          </a:xfrm>
+          <a:prstGeom prst="rect">
+            <a:avLst/>
+          </a:prstGeom>
+          <a:noFill/>
+        </p:spPr>
+        <p:txBody>
+          <a:bodyPr wrap="square">
+            <a:spAutoFit/>
+          </a:bodyPr>
+          <a:lstStyle/>
+          <a:p>
+            <a:r>
+              <a:rPr sz="1750" b="1" i="0">
                 <a:solidFill>
                   <a:srgbClr val="C8603A"/>
                 </a:solidFill>
@@ -6621,22 +6621,22 @@
         </p:nvSpPr>
         <p:spPr>
           <a:xfrm>
-            <a:off x="548640" y="2530000"/>
-            <a:ext cx="11064240" cy="340000"/>
-          </a:xfrm>
-          <a:prstGeom prst="rect">
-            <a:avLst/>
-          </a:prstGeom>
-          <a:noFill/>
-        </p:spPr>
-        <p:txBody>
-          <a:bodyPr wrap="square">
-            <a:spAutoFit/>
-          </a:bodyPr>
-          <a:lstStyle/>
-          <a:p>
-            <a:r>
-              <a:rPr sz="1400" b="1" i="0">
+            <a:off x="548640" y="3655000"/>
+            <a:ext cx="11064240" cy="1130000"/>
+          </a:xfrm>
+          <a:prstGeom prst="rect">
+            <a:avLst/>
+          </a:prstGeom>
+          <a:noFill/>
+        </p:spPr>
+        <p:txBody>
+          <a:bodyPr wrap="square">
+            <a:spAutoFit/>
+          </a:bodyPr>
+          <a:lstStyle/>
+          <a:p>
+            <a:r>
+              <a:rPr sz="1750" b="1" i="0">
                 <a:solidFill>
                   <a:srgbClr val="C8603A"/>
                 </a:solidFill>
@@ -6655,22 +6655,22 @@
         </p:nvSpPr>
         <p:spPr>
           <a:xfrm>
-            <a:off x="548640" y="3030000"/>
-            <a:ext cx="11064240" cy="340000"/>
-          </a:xfrm>
-          <a:prstGeom prst="rect">
-            <a:avLst/>
-          </a:prstGeom>
-          <a:noFill/>
-        </p:spPr>
-        <p:txBody>
-          <a:bodyPr wrap="square">
-            <a:spAutoFit/>
-          </a:bodyPr>
-          <a:lstStyle/>
-          <a:p>
-            <a:r>
-              <a:rPr sz="1400" b="0" i="0">
+            <a:off x="548640" y="4280000"/>
+            <a:ext cx="11064240" cy="1130000"/>
+          </a:xfrm>
+          <a:prstGeom prst="rect">
+            <a:avLst/>
+          </a:prstGeom>
+          <a:noFill/>
+        </p:spPr>
+        <p:txBody>
+          <a:bodyPr wrap="square">
+            <a:spAutoFit/>
+          </a:bodyPr>
+          <a:lstStyle/>
+          <a:p>
+            <a:r>
+              <a:rPr sz="1750" b="0" i="0">
                 <a:solidFill>
                   <a:srgbClr val="1A1A17"/>
                 </a:solidFill>
@@ -6689,22 +6689,22 @@
         </p:nvSpPr>
         <p:spPr>
           <a:xfrm>
-            <a:off x="548640" y="3360000"/>
-            <a:ext cx="11064240" cy="340000"/>
-          </a:xfrm>
-          <a:prstGeom prst="rect">
-            <a:avLst/>
-          </a:prstGeom>
-          <a:noFill/>
-        </p:spPr>
-        <p:txBody>
-          <a:bodyPr wrap="square">
-            <a:spAutoFit/>
-          </a:bodyPr>
-          <a:lstStyle/>
-          <a:p>
-            <a:r>
-              <a:rPr sz="1400" b="0" i="0">
+            <a:off x="548640" y="4695000"/>
+            <a:ext cx="11064240" cy="1130000"/>
+          </a:xfrm>
+          <a:prstGeom prst="rect">
+            <a:avLst/>
+          </a:prstGeom>
+          <a:noFill/>
+        </p:spPr>
+        <p:txBody>
+          <a:bodyPr wrap="square">
+            <a:spAutoFit/>
+          </a:bodyPr>
+          <a:lstStyle/>
+          <a:p>
+            <a:r>
+              <a:rPr sz="1750" b="0" i="0">
                 <a:solidFill>
                   <a:srgbClr val="1A1A17"/>
                 </a:solidFill>
@@ -6723,22 +6723,22 @@
         </p:nvSpPr>
         <p:spPr>
           <a:xfrm>
-            <a:off x="548640" y="3690000"/>
-            <a:ext cx="11064240" cy="340000"/>
-          </a:xfrm>
-          <a:prstGeom prst="rect">
-            <a:avLst/>
-          </a:prstGeom>
-          <a:noFill/>
-        </p:spPr>
-        <p:txBody>
-          <a:bodyPr wrap="square">
-            <a:spAutoFit/>
-          </a:bodyPr>
-          <a:lstStyle/>
-          <a:p>
-            <a:r>
-              <a:rPr sz="1400" b="0" i="0">
+            <a:off x="548640" y="5110000"/>
+            <a:ext cx="11064240" cy="1130000"/>
+          </a:xfrm>
+          <a:prstGeom prst="rect">
+            <a:avLst/>
+          </a:prstGeom>
+          <a:noFill/>
+        </p:spPr>
+        <p:txBody>
+          <a:bodyPr wrap="square">
+            <a:spAutoFit/>
+          </a:bodyPr>
+          <a:lstStyle/>
+          <a:p>
+            <a:r>
+              <a:rPr sz="1750" b="0" i="0">
                 <a:solidFill>
                   <a:srgbClr val="1A1A17"/>
                 </a:solidFill>
@@ -6783,22 +6783,22 @@
         </p:nvSpPr>
         <p:spPr>
           <a:xfrm>
-            <a:off x="548640" y="384048"/>
-            <a:ext cx="11064240" cy="365760"/>
-          </a:xfrm>
-          <a:prstGeom prst="rect">
-            <a:avLst/>
-          </a:prstGeom>
-          <a:noFill/>
-        </p:spPr>
-        <p:txBody>
-          <a:bodyPr wrap="square">
-            <a:spAutoFit/>
-          </a:bodyPr>
-          <a:lstStyle/>
-          <a:p>
-            <a:r>
-              <a:rPr sz="1250" b="1" i="0">
+            <a:off x="548640" y="365760"/>
+            <a:ext cx="11064240" cy="400000"/>
+          </a:xfrm>
+          <a:prstGeom prst="rect">
+            <a:avLst/>
+          </a:prstGeom>
+          <a:noFill/>
+        </p:spPr>
+        <p:txBody>
+          <a:bodyPr wrap="square">
+            <a:spAutoFit/>
+          </a:bodyPr>
+          <a:lstStyle/>
+          <a:p>
+            <a:r>
+              <a:rPr sz="1400" b="1" i="0">
                 <a:solidFill>
                   <a:srgbClr val="C8603A"/>
                 </a:solidFill>
@@ -6817,22 +6817,22 @@
         </p:nvSpPr>
         <p:spPr>
           <a:xfrm>
-            <a:off x="548640" y="658368"/>
-            <a:ext cx="11064240" cy="640080"/>
-          </a:xfrm>
-          <a:prstGeom prst="rect">
-            <a:avLst/>
-          </a:prstGeom>
-          <a:noFill/>
-        </p:spPr>
-        <p:txBody>
-          <a:bodyPr wrap="square">
-            <a:spAutoFit/>
-          </a:bodyPr>
-          <a:lstStyle/>
-          <a:p>
-            <a:r>
-              <a:rPr sz="2700" b="1" i="0">
+            <a:off x="548640" y="685800"/>
+            <a:ext cx="11064240" cy="820000"/>
+          </a:xfrm>
+          <a:prstGeom prst="rect">
+            <a:avLst/>
+          </a:prstGeom>
+          <a:noFill/>
+        </p:spPr>
+        <p:txBody>
+          <a:bodyPr wrap="square">
+            <a:spAutoFit/>
+          </a:bodyPr>
+          <a:lstStyle/>
+          <a:p>
+            <a:r>
+              <a:rPr sz="3300" b="1" i="0">
                 <a:solidFill>
                   <a:srgbClr val="1A1A17"/>
                 </a:solidFill>
@@ -6851,7 +6851,7 @@
         </p:nvSpPr>
         <p:spPr>
           <a:xfrm>
-            <a:off x="576072" y="1371600"/>
+            <a:off x="576072" y="1524000"/>
             <a:ext cx="713232" cy="38100"/>
           </a:xfrm>
           <a:prstGeom prst="roundRect">
@@ -6878,22 +6878,22 @@
         </p:nvSpPr>
         <p:spPr>
           <a:xfrm>
-            <a:off x="548640" y="1600000"/>
-            <a:ext cx="11064240" cy="400000"/>
-          </a:xfrm>
-          <a:prstGeom prst="rect">
-            <a:avLst/>
-          </a:prstGeom>
-          <a:noFill/>
-        </p:spPr>
-        <p:txBody>
-          <a:bodyPr wrap="square">
-            <a:spAutoFit/>
-          </a:bodyPr>
-          <a:lstStyle/>
-          <a:p>
-            <a:r>
-              <a:rPr sz="1500" b="0" i="0">
+            <a:off x="548640" y="2500000"/>
+            <a:ext cx="11064240" cy="1190000"/>
+          </a:xfrm>
+          <a:prstGeom prst="rect">
+            <a:avLst/>
+          </a:prstGeom>
+          <a:noFill/>
+        </p:spPr>
+        <p:txBody>
+          <a:bodyPr wrap="square">
+            <a:spAutoFit/>
+          </a:bodyPr>
+          <a:lstStyle/>
+          <a:p>
+            <a:r>
+              <a:rPr sz="1850" b="0" i="0">
                 <a:solidFill>
                   <a:srgbClr val="5A5A52"/>
                 </a:solidFill>
@@ -6912,22 +6912,22 @@
         </p:nvSpPr>
         <p:spPr>
           <a:xfrm>
-            <a:off x="548640" y="2190000"/>
-            <a:ext cx="11064240" cy="260000"/>
-          </a:xfrm>
-          <a:prstGeom prst="rect">
-            <a:avLst/>
-          </a:prstGeom>
-          <a:noFill/>
-        </p:spPr>
-        <p:txBody>
-          <a:bodyPr wrap="square">
-            <a:spAutoFit/>
-          </a:bodyPr>
-          <a:lstStyle/>
-          <a:p>
-            <a:r>
-              <a:rPr sz="1050" b="0" i="0">
+            <a:off x="548640" y="3230000"/>
+            <a:ext cx="11064240" cy="1030000"/>
+          </a:xfrm>
+          <a:prstGeom prst="rect">
+            <a:avLst/>
+          </a:prstGeom>
+          <a:noFill/>
+        </p:spPr>
+        <p:txBody>
+          <a:bodyPr wrap="square">
+            <a:spAutoFit/>
+          </a:bodyPr>
+          <a:lstStyle/>
+          <a:p>
+            <a:r>
+              <a:rPr sz="1400" b="0" i="0">
                 <a:solidFill>
                   <a:srgbClr val="1A1A17"/>
                 </a:solidFill>
@@ -6946,22 +6946,22 @@
         </p:nvSpPr>
         <p:spPr>
           <a:xfrm>
-            <a:off x="548640" y="2425000"/>
-            <a:ext cx="11064240" cy="260000"/>
-          </a:xfrm>
-          <a:prstGeom prst="rect">
-            <a:avLst/>
-          </a:prstGeom>
-          <a:noFill/>
-        </p:spPr>
-        <p:txBody>
-          <a:bodyPr wrap="square">
-            <a:spAutoFit/>
-          </a:bodyPr>
-          <a:lstStyle/>
-          <a:p>
-            <a:r>
-              <a:rPr sz="1050" b="0" i="0">
+            <a:off x="548640" y="3530000"/>
+            <a:ext cx="11064240" cy="1030000"/>
+          </a:xfrm>
+          <a:prstGeom prst="rect">
+            <a:avLst/>
+          </a:prstGeom>
+          <a:noFill/>
+        </p:spPr>
+        <p:txBody>
+          <a:bodyPr wrap="square">
+            <a:spAutoFit/>
+          </a:bodyPr>
+          <a:lstStyle/>
+          <a:p>
+            <a:r>
+              <a:rPr sz="1400" b="0" i="0">
                 <a:solidFill>
                   <a:srgbClr val="1A1A17"/>
                 </a:solidFill>
@@ -6980,22 +6980,22 @@
         </p:nvSpPr>
         <p:spPr>
           <a:xfrm>
-            <a:off x="548640" y="2660000"/>
-            <a:ext cx="11064240" cy="260000"/>
-          </a:xfrm>
-          <a:prstGeom prst="rect">
-            <a:avLst/>
-          </a:prstGeom>
-          <a:noFill/>
-        </p:spPr>
-        <p:txBody>
-          <a:bodyPr wrap="square">
-            <a:spAutoFit/>
-          </a:bodyPr>
-          <a:lstStyle/>
-          <a:p>
-            <a:r>
-              <a:rPr sz="1050" b="0" i="0">
+            <a:off x="548640" y="3830000"/>
+            <a:ext cx="11064240" cy="1030000"/>
+          </a:xfrm>
+          <a:prstGeom prst="rect">
+            <a:avLst/>
+          </a:prstGeom>
+          <a:noFill/>
+        </p:spPr>
+        <p:txBody>
+          <a:bodyPr wrap="square">
+            <a:spAutoFit/>
+          </a:bodyPr>
+          <a:lstStyle/>
+          <a:p>
+            <a:r>
+              <a:rPr sz="1400" b="0" i="0">
                 <a:solidFill>
                   <a:srgbClr val="1A1A17"/>
                 </a:solidFill>
@@ -7014,22 +7014,22 @@
         </p:nvSpPr>
         <p:spPr>
           <a:xfrm>
-            <a:off x="548640" y="2895000"/>
-            <a:ext cx="11064240" cy="260000"/>
-          </a:xfrm>
-          <a:prstGeom prst="rect">
-            <a:avLst/>
-          </a:prstGeom>
-          <a:noFill/>
-        </p:spPr>
-        <p:txBody>
-          <a:bodyPr wrap="square">
-            <a:spAutoFit/>
-          </a:bodyPr>
-          <a:lstStyle/>
-          <a:p>
-            <a:r>
-              <a:rPr sz="1050" b="0" i="0">
+            <a:off x="548640" y="4130000"/>
+            <a:ext cx="11064240" cy="1030000"/>
+          </a:xfrm>
+          <a:prstGeom prst="rect">
+            <a:avLst/>
+          </a:prstGeom>
+          <a:noFill/>
+        </p:spPr>
+        <p:txBody>
+          <a:bodyPr wrap="square">
+            <a:spAutoFit/>
+          </a:bodyPr>
+          <a:lstStyle/>
+          <a:p>
+            <a:r>
+              <a:rPr sz="1400" b="0" i="0">
                 <a:solidFill>
                   <a:srgbClr val="1A1A17"/>
                 </a:solidFill>
@@ -7048,22 +7048,22 @@
         </p:nvSpPr>
         <p:spPr>
           <a:xfrm>
-            <a:off x="548640" y="3130000"/>
-            <a:ext cx="11064240" cy="260000"/>
-          </a:xfrm>
-          <a:prstGeom prst="rect">
-            <a:avLst/>
-          </a:prstGeom>
-          <a:noFill/>
-        </p:spPr>
-        <p:txBody>
-          <a:bodyPr wrap="square">
-            <a:spAutoFit/>
-          </a:bodyPr>
-          <a:lstStyle/>
-          <a:p>
-            <a:r>
-              <a:rPr sz="1050" b="0" i="0">
+            <a:off x="548640" y="4430000"/>
+            <a:ext cx="11064240" cy="1030000"/>
+          </a:xfrm>
+          <a:prstGeom prst="rect">
+            <a:avLst/>
+          </a:prstGeom>
+          <a:noFill/>
+        </p:spPr>
+        <p:txBody>
+          <a:bodyPr wrap="square">
+            <a:spAutoFit/>
+          </a:bodyPr>
+          <a:lstStyle/>
+          <a:p>
+            <a:r>
+              <a:rPr sz="1400" b="0" i="0">
                 <a:solidFill>
                   <a:srgbClr val="1A1A17"/>
                 </a:solidFill>
@@ -7082,22 +7082,22 @@
         </p:nvSpPr>
         <p:spPr>
           <a:xfrm>
-            <a:off x="548640" y="3525000"/>
-            <a:ext cx="11064240" cy="340000"/>
-          </a:xfrm>
-          <a:prstGeom prst="rect">
-            <a:avLst/>
-          </a:prstGeom>
-          <a:noFill/>
-        </p:spPr>
-        <p:txBody>
-          <a:bodyPr wrap="square">
-            <a:spAutoFit/>
-          </a:bodyPr>
-          <a:lstStyle/>
-          <a:p>
-            <a:r>
-              <a:rPr sz="1400" b="1" i="0">
+            <a:off x="548640" y="4930000"/>
+            <a:ext cx="11064240" cy="1130000"/>
+          </a:xfrm>
+          <a:prstGeom prst="rect">
+            <a:avLst/>
+          </a:prstGeom>
+          <a:noFill/>
+        </p:spPr>
+        <p:txBody>
+          <a:bodyPr wrap="square">
+            <a:spAutoFit/>
+          </a:bodyPr>
+          <a:lstStyle/>
+          <a:p>
+            <a:r>
+              <a:rPr sz="1750" b="1" i="0">
                 <a:solidFill>
                   <a:srgbClr val="B3261E"/>
                 </a:solidFill>
@@ -7142,22 +7142,22 @@
         </p:nvSpPr>
         <p:spPr>
           <a:xfrm>
-            <a:off x="548640" y="384048"/>
-            <a:ext cx="11064240" cy="365760"/>
-          </a:xfrm>
-          <a:prstGeom prst="rect">
-            <a:avLst/>
-          </a:prstGeom>
-          <a:noFill/>
-        </p:spPr>
-        <p:txBody>
-          <a:bodyPr wrap="square">
-            <a:spAutoFit/>
-          </a:bodyPr>
-          <a:lstStyle/>
-          <a:p>
-            <a:r>
-              <a:rPr sz="1250" b="1" i="0">
+            <a:off x="548640" y="365760"/>
+            <a:ext cx="11064240" cy="400000"/>
+          </a:xfrm>
+          <a:prstGeom prst="rect">
+            <a:avLst/>
+          </a:prstGeom>
+          <a:noFill/>
+        </p:spPr>
+        <p:txBody>
+          <a:bodyPr wrap="square">
+            <a:spAutoFit/>
+          </a:bodyPr>
+          <a:lstStyle/>
+          <a:p>
+            <a:r>
+              <a:rPr sz="1400" b="1" i="0">
                 <a:solidFill>
                   <a:srgbClr val="C8603A"/>
                 </a:solidFill>
@@ -7176,22 +7176,22 @@
         </p:nvSpPr>
         <p:spPr>
           <a:xfrm>
-            <a:off x="548640" y="658368"/>
-            <a:ext cx="11064240" cy="640080"/>
-          </a:xfrm>
-          <a:prstGeom prst="rect">
-            <a:avLst/>
-          </a:prstGeom>
-          <a:noFill/>
-        </p:spPr>
-        <p:txBody>
-          <a:bodyPr wrap="square">
-            <a:spAutoFit/>
-          </a:bodyPr>
-          <a:lstStyle/>
-          <a:p>
-            <a:r>
-              <a:rPr sz="2700" b="1" i="0">
+            <a:off x="548640" y="685800"/>
+            <a:ext cx="11064240" cy="820000"/>
+          </a:xfrm>
+          <a:prstGeom prst="rect">
+            <a:avLst/>
+          </a:prstGeom>
+          <a:noFill/>
+        </p:spPr>
+        <p:txBody>
+          <a:bodyPr wrap="square">
+            <a:spAutoFit/>
+          </a:bodyPr>
+          <a:lstStyle/>
+          <a:p>
+            <a:r>
+              <a:rPr sz="3300" b="1" i="0">
                 <a:solidFill>
                   <a:srgbClr val="1A1A17"/>
                 </a:solidFill>
@@ -7210,7 +7210,7 @@
         </p:nvSpPr>
         <p:spPr>
           <a:xfrm>
-            <a:off x="576072" y="1371600"/>
+            <a:off x="576072" y="1524000"/>
             <a:ext cx="713232" cy="38100"/>
           </a:xfrm>
           <a:prstGeom prst="roundRect">
@@ -7237,22 +7237,22 @@
         </p:nvSpPr>
         <p:spPr>
           <a:xfrm>
-            <a:off x="548640" y="1600000"/>
-            <a:ext cx="11064240" cy="400000"/>
-          </a:xfrm>
-          <a:prstGeom prst="rect">
-            <a:avLst/>
-          </a:prstGeom>
-          <a:noFill/>
-        </p:spPr>
-        <p:txBody>
-          <a:bodyPr wrap="square">
-            <a:spAutoFit/>
-          </a:bodyPr>
-          <a:lstStyle/>
-          <a:p>
-            <a:r>
-              <a:rPr sz="1500" b="0" i="0">
+            <a:off x="548640" y="2500000"/>
+            <a:ext cx="11064240" cy="1190000"/>
+          </a:xfrm>
+          <a:prstGeom prst="rect">
+            <a:avLst/>
+          </a:prstGeom>
+          <a:noFill/>
+        </p:spPr>
+        <p:txBody>
+          <a:bodyPr wrap="square">
+            <a:spAutoFit/>
+          </a:bodyPr>
+          <a:lstStyle/>
+          <a:p>
+            <a:r>
+              <a:rPr sz="1850" b="0" i="0">
                 <a:solidFill>
                   <a:srgbClr val="5A5A52"/>
                 </a:solidFill>
@@ -7271,22 +7271,22 @@
         </p:nvSpPr>
         <p:spPr>
           <a:xfrm>
-            <a:off x="548640" y="2190000"/>
-            <a:ext cx="11064240" cy="260000"/>
-          </a:xfrm>
-          <a:prstGeom prst="rect">
-            <a:avLst/>
-          </a:prstGeom>
-          <a:noFill/>
-        </p:spPr>
-        <p:txBody>
-          <a:bodyPr wrap="square">
-            <a:spAutoFit/>
-          </a:bodyPr>
-          <a:lstStyle/>
-          <a:p>
-            <a:r>
-              <a:rPr sz="1050" b="0" i="0">
+            <a:off x="548640" y="3230000"/>
+            <a:ext cx="11064240" cy="1030000"/>
+          </a:xfrm>
+          <a:prstGeom prst="rect">
+            <a:avLst/>
+          </a:prstGeom>
+          <a:noFill/>
+        </p:spPr>
+        <p:txBody>
+          <a:bodyPr wrap="square">
+            <a:spAutoFit/>
+          </a:bodyPr>
+          <a:lstStyle/>
+          <a:p>
+            <a:r>
+              <a:rPr sz="1400" b="0" i="0">
                 <a:solidFill>
                   <a:srgbClr val="1A1A17"/>
                 </a:solidFill>
@@ -7305,22 +7305,22 @@
         </p:nvSpPr>
         <p:spPr>
           <a:xfrm>
-            <a:off x="548640" y="2425000"/>
-            <a:ext cx="11064240" cy="260000"/>
-          </a:xfrm>
-          <a:prstGeom prst="rect">
-            <a:avLst/>
-          </a:prstGeom>
-          <a:noFill/>
-        </p:spPr>
-        <p:txBody>
-          <a:bodyPr wrap="square">
-            <a:spAutoFit/>
-          </a:bodyPr>
-          <a:lstStyle/>
-          <a:p>
-            <a:r>
-              <a:rPr sz="1050" b="0" i="0">
+            <a:off x="548640" y="3530000"/>
+            <a:ext cx="11064240" cy="1030000"/>
+          </a:xfrm>
+          <a:prstGeom prst="rect">
+            <a:avLst/>
+          </a:prstGeom>
+          <a:noFill/>
+        </p:spPr>
+        <p:txBody>
+          <a:bodyPr wrap="square">
+            <a:spAutoFit/>
+          </a:bodyPr>
+          <a:lstStyle/>
+          <a:p>
+            <a:r>
+              <a:rPr sz="1400" b="0" i="0">
                 <a:solidFill>
                   <a:srgbClr val="1A1A17"/>
                 </a:solidFill>
@@ -7339,22 +7339,22 @@
         </p:nvSpPr>
         <p:spPr>
           <a:xfrm>
-            <a:off x="548640" y="2660000"/>
-            <a:ext cx="11064240" cy="260000"/>
-          </a:xfrm>
-          <a:prstGeom prst="rect">
-            <a:avLst/>
-          </a:prstGeom>
-          <a:noFill/>
-        </p:spPr>
-        <p:txBody>
-          <a:bodyPr wrap="square">
-            <a:spAutoFit/>
-          </a:bodyPr>
-          <a:lstStyle/>
-          <a:p>
-            <a:r>
-              <a:rPr sz="1050" b="0" i="0">
+            <a:off x="548640" y="3830000"/>
+            <a:ext cx="11064240" cy="1030000"/>
+          </a:xfrm>
+          <a:prstGeom prst="rect">
+            <a:avLst/>
+          </a:prstGeom>
+          <a:noFill/>
+        </p:spPr>
+        <p:txBody>
+          <a:bodyPr wrap="square">
+            <a:spAutoFit/>
+          </a:bodyPr>
+          <a:lstStyle/>
+          <a:p>
+            <a:r>
+              <a:rPr sz="1400" b="0" i="0">
                 <a:solidFill>
                   <a:srgbClr val="1A1A17"/>
                 </a:solidFill>
@@ -7373,22 +7373,22 @@
         </p:nvSpPr>
         <p:spPr>
           <a:xfrm>
-            <a:off x="548640" y="2895000"/>
-            <a:ext cx="11064240" cy="260000"/>
-          </a:xfrm>
-          <a:prstGeom prst="rect">
-            <a:avLst/>
-          </a:prstGeom>
-          <a:noFill/>
-        </p:spPr>
-        <p:txBody>
-          <a:bodyPr wrap="square">
-            <a:spAutoFit/>
-          </a:bodyPr>
-          <a:lstStyle/>
-          <a:p>
-            <a:r>
-              <a:rPr sz="1050" b="0" i="0">
+            <a:off x="548640" y="4130000"/>
+            <a:ext cx="11064240" cy="1030000"/>
+          </a:xfrm>
+          <a:prstGeom prst="rect">
+            <a:avLst/>
+          </a:prstGeom>
+          <a:noFill/>
+        </p:spPr>
+        <p:txBody>
+          <a:bodyPr wrap="square">
+            <a:spAutoFit/>
+          </a:bodyPr>
+          <a:lstStyle/>
+          <a:p>
+            <a:r>
+              <a:rPr sz="1400" b="0" i="0">
                 <a:solidFill>
                   <a:srgbClr val="1A1A17"/>
                 </a:solidFill>
@@ -7407,22 +7407,22 @@
         </p:nvSpPr>
         <p:spPr>
           <a:xfrm>
-            <a:off x="548640" y="3130000"/>
-            <a:ext cx="11064240" cy="260000"/>
-          </a:xfrm>
-          <a:prstGeom prst="rect">
-            <a:avLst/>
-          </a:prstGeom>
-          <a:noFill/>
-        </p:spPr>
-        <p:txBody>
-          <a:bodyPr wrap="square">
-            <a:spAutoFit/>
-          </a:bodyPr>
-          <a:lstStyle/>
-          <a:p>
-            <a:r>
-              <a:rPr sz="1050" b="0" i="0">
+            <a:off x="548640" y="4430000"/>
+            <a:ext cx="11064240" cy="1030000"/>
+          </a:xfrm>
+          <a:prstGeom prst="rect">
+            <a:avLst/>
+          </a:prstGeom>
+          <a:noFill/>
+        </p:spPr>
+        <p:txBody>
+          <a:bodyPr wrap="square">
+            <a:spAutoFit/>
+          </a:bodyPr>
+          <a:lstStyle/>
+          <a:p>
+            <a:r>
+              <a:rPr sz="1400" b="0" i="0">
                 <a:solidFill>
                   <a:srgbClr val="1A1A17"/>
                 </a:solidFill>
@@ -7441,22 +7441,22 @@
         </p:nvSpPr>
         <p:spPr>
           <a:xfrm>
-            <a:off x="548640" y="3525000"/>
-            <a:ext cx="11064240" cy="340000"/>
-          </a:xfrm>
-          <a:prstGeom prst="rect">
-            <a:avLst/>
-          </a:prstGeom>
-          <a:noFill/>
-        </p:spPr>
-        <p:txBody>
-          <a:bodyPr wrap="square">
-            <a:spAutoFit/>
-          </a:bodyPr>
-          <a:lstStyle/>
-          <a:p>
-            <a:r>
-              <a:rPr sz="1400" b="1" i="0">
+            <a:off x="548640" y="4930000"/>
+            <a:ext cx="11064240" cy="1130000"/>
+          </a:xfrm>
+          <a:prstGeom prst="rect">
+            <a:avLst/>
+          </a:prstGeom>
+          <a:noFill/>
+        </p:spPr>
+        <p:txBody>
+          <a:bodyPr wrap="square">
+            <a:spAutoFit/>
+          </a:bodyPr>
+          <a:lstStyle/>
+          <a:p>
+            <a:r>
+              <a:rPr sz="1750" b="1" i="0">
                 <a:solidFill>
                   <a:srgbClr val="C8603A"/>
                 </a:solidFill>
@@ -7501,22 +7501,22 @@
         </p:nvSpPr>
         <p:spPr>
           <a:xfrm>
-            <a:off x="548640" y="384048"/>
-            <a:ext cx="11064240" cy="365760"/>
-          </a:xfrm>
-          <a:prstGeom prst="rect">
-            <a:avLst/>
-          </a:prstGeom>
-          <a:noFill/>
-        </p:spPr>
-        <p:txBody>
-          <a:bodyPr wrap="square">
-            <a:spAutoFit/>
-          </a:bodyPr>
-          <a:lstStyle/>
-          <a:p>
-            <a:r>
-              <a:rPr sz="1250" b="1" i="0">
+            <a:off x="548640" y="365760"/>
+            <a:ext cx="11064240" cy="400000"/>
+          </a:xfrm>
+          <a:prstGeom prst="rect">
+            <a:avLst/>
+          </a:prstGeom>
+          <a:noFill/>
+        </p:spPr>
+        <p:txBody>
+          <a:bodyPr wrap="square">
+            <a:spAutoFit/>
+          </a:bodyPr>
+          <a:lstStyle/>
+          <a:p>
+            <a:r>
+              <a:rPr sz="1400" b="1" i="0">
                 <a:solidFill>
                   <a:srgbClr val="C8603A"/>
                 </a:solidFill>
@@ -7535,22 +7535,22 @@
         </p:nvSpPr>
         <p:spPr>
           <a:xfrm>
-            <a:off x="548640" y="658368"/>
-            <a:ext cx="11064240" cy="640080"/>
-          </a:xfrm>
-          <a:prstGeom prst="rect">
-            <a:avLst/>
-          </a:prstGeom>
-          <a:noFill/>
-        </p:spPr>
-        <p:txBody>
-          <a:bodyPr wrap="square">
-            <a:spAutoFit/>
-          </a:bodyPr>
-          <a:lstStyle/>
-          <a:p>
-            <a:r>
-              <a:rPr sz="2700" b="1" i="0">
+            <a:off x="548640" y="685800"/>
+            <a:ext cx="11064240" cy="820000"/>
+          </a:xfrm>
+          <a:prstGeom prst="rect">
+            <a:avLst/>
+          </a:prstGeom>
+          <a:noFill/>
+        </p:spPr>
+        <p:txBody>
+          <a:bodyPr wrap="square">
+            <a:spAutoFit/>
+          </a:bodyPr>
+          <a:lstStyle/>
+          <a:p>
+            <a:r>
+              <a:rPr sz="3300" b="1" i="0">
                 <a:solidFill>
                   <a:srgbClr val="1A1A17"/>
                 </a:solidFill>
@@ -7569,7 +7569,7 @@
         </p:nvSpPr>
         <p:spPr>
           <a:xfrm>
-            <a:off x="576072" y="1371600"/>
+            <a:off x="576072" y="1524000"/>
             <a:ext cx="713232" cy="38100"/>
           </a:xfrm>
           <a:prstGeom prst="roundRect">
@@ -7596,22 +7596,22 @@
         </p:nvSpPr>
         <p:spPr>
           <a:xfrm>
-            <a:off x="548640" y="1600000"/>
-            <a:ext cx="11064240" cy="400000"/>
-          </a:xfrm>
-          <a:prstGeom prst="rect">
-            <a:avLst/>
-          </a:prstGeom>
-          <a:noFill/>
-        </p:spPr>
-        <p:txBody>
-          <a:bodyPr wrap="square">
-            <a:spAutoFit/>
-          </a:bodyPr>
-          <a:lstStyle/>
-          <a:p>
-            <a:r>
-              <a:rPr sz="1500" b="0" i="0">
+            <a:off x="548640" y="2500000"/>
+            <a:ext cx="11064240" cy="1190000"/>
+          </a:xfrm>
+          <a:prstGeom prst="rect">
+            <a:avLst/>
+          </a:prstGeom>
+          <a:noFill/>
+        </p:spPr>
+        <p:txBody>
+          <a:bodyPr wrap="square">
+            <a:spAutoFit/>
+          </a:bodyPr>
+          <a:lstStyle/>
+          <a:p>
+            <a:r>
+              <a:rPr sz="1850" b="0" i="0">
                 <a:solidFill>
                   <a:srgbClr val="5A5A52"/>
                 </a:solidFill>
@@ -7630,22 +7630,22 @@
         </p:nvSpPr>
         <p:spPr>
           <a:xfrm>
-            <a:off x="548640" y="2190000"/>
-            <a:ext cx="11064240" cy="260000"/>
-          </a:xfrm>
-          <a:prstGeom prst="rect">
-            <a:avLst/>
-          </a:prstGeom>
-          <a:noFill/>
-        </p:spPr>
-        <p:txBody>
-          <a:bodyPr wrap="square">
-            <a:spAutoFit/>
-          </a:bodyPr>
-          <a:lstStyle/>
-          <a:p>
-            <a:r>
-              <a:rPr sz="1050" b="0" i="0">
+            <a:off x="548640" y="3230000"/>
+            <a:ext cx="11064240" cy="1030000"/>
+          </a:xfrm>
+          <a:prstGeom prst="rect">
+            <a:avLst/>
+          </a:prstGeom>
+          <a:noFill/>
+        </p:spPr>
+        <p:txBody>
+          <a:bodyPr wrap="square">
+            <a:spAutoFit/>
+          </a:bodyPr>
+          <a:lstStyle/>
+          <a:p>
+            <a:r>
+              <a:rPr sz="1400" b="0" i="0">
                 <a:solidFill>
                   <a:srgbClr val="1A1A17"/>
                 </a:solidFill>
@@ -7664,22 +7664,22 @@
         </p:nvSpPr>
         <p:spPr>
           <a:xfrm>
-            <a:off x="548640" y="2425000"/>
-            <a:ext cx="11064240" cy="260000"/>
-          </a:xfrm>
-          <a:prstGeom prst="rect">
-            <a:avLst/>
-          </a:prstGeom>
-          <a:noFill/>
-        </p:spPr>
-        <p:txBody>
-          <a:bodyPr wrap="square">
-            <a:spAutoFit/>
-          </a:bodyPr>
-          <a:lstStyle/>
-          <a:p>
-            <a:r>
-              <a:rPr sz="1050" b="0" i="0">
+            <a:off x="548640" y="3530000"/>
+            <a:ext cx="11064240" cy="1030000"/>
+          </a:xfrm>
+          <a:prstGeom prst="rect">
+            <a:avLst/>
+          </a:prstGeom>
+          <a:noFill/>
+        </p:spPr>
+        <p:txBody>
+          <a:bodyPr wrap="square">
+            <a:spAutoFit/>
+          </a:bodyPr>
+          <a:lstStyle/>
+          <a:p>
+            <a:r>
+              <a:rPr sz="1400" b="0" i="0">
                 <a:solidFill>
                   <a:srgbClr val="1A1A17"/>
                 </a:solidFill>
@@ -7698,22 +7698,22 @@
         </p:nvSpPr>
         <p:spPr>
           <a:xfrm>
-            <a:off x="548640" y="2660000"/>
-            <a:ext cx="11064240" cy="260000"/>
-          </a:xfrm>
-          <a:prstGeom prst="rect">
-            <a:avLst/>
-          </a:prstGeom>
-          <a:noFill/>
-        </p:spPr>
-        <p:txBody>
-          <a:bodyPr wrap="square">
-            <a:spAutoFit/>
-          </a:bodyPr>
-          <a:lstStyle/>
-          <a:p>
-            <a:r>
-              <a:rPr sz="1050" b="0" i="0">
+            <a:off x="548640" y="3830000"/>
+            <a:ext cx="11064240" cy="1030000"/>
+          </a:xfrm>
+          <a:prstGeom prst="rect">
+            <a:avLst/>
+          </a:prstGeom>
+          <a:noFill/>
+        </p:spPr>
+        <p:txBody>
+          <a:bodyPr wrap="square">
+            <a:spAutoFit/>
+          </a:bodyPr>
+          <a:lstStyle/>
+          <a:p>
+            <a:r>
+              <a:rPr sz="1400" b="0" i="0">
                 <a:solidFill>
                   <a:srgbClr val="1A1A17"/>
                 </a:solidFill>
@@ -7732,22 +7732,22 @@
         </p:nvSpPr>
         <p:spPr>
           <a:xfrm>
-            <a:off x="548640" y="2895000"/>
-            <a:ext cx="11064240" cy="260000"/>
-          </a:xfrm>
-          <a:prstGeom prst="rect">
-            <a:avLst/>
-          </a:prstGeom>
-          <a:noFill/>
-        </p:spPr>
-        <p:txBody>
-          <a:bodyPr wrap="square">
-            <a:spAutoFit/>
-          </a:bodyPr>
-          <a:lstStyle/>
-          <a:p>
-            <a:r>
-              <a:rPr sz="1050" b="0" i="0">
+            <a:off x="548640" y="4130000"/>
+            <a:ext cx="11064240" cy="1030000"/>
+          </a:xfrm>
+          <a:prstGeom prst="rect">
+            <a:avLst/>
+          </a:prstGeom>
+          <a:noFill/>
+        </p:spPr>
+        <p:txBody>
+          <a:bodyPr wrap="square">
+            <a:spAutoFit/>
+          </a:bodyPr>
+          <a:lstStyle/>
+          <a:p>
+            <a:r>
+              <a:rPr sz="1400" b="0" i="0">
                 <a:solidFill>
                   <a:srgbClr val="1A1A17"/>
                 </a:solidFill>
@@ -7766,22 +7766,22 @@
         </p:nvSpPr>
         <p:spPr>
           <a:xfrm>
-            <a:off x="548640" y="3130000"/>
-            <a:ext cx="11064240" cy="260000"/>
-          </a:xfrm>
-          <a:prstGeom prst="rect">
-            <a:avLst/>
-          </a:prstGeom>
-          <a:noFill/>
-        </p:spPr>
-        <p:txBody>
-          <a:bodyPr wrap="square">
-            <a:spAutoFit/>
-          </a:bodyPr>
-          <a:lstStyle/>
-          <a:p>
-            <a:r>
-              <a:rPr sz="1050" b="0" i="0">
+            <a:off x="548640" y="4430000"/>
+            <a:ext cx="11064240" cy="1030000"/>
+          </a:xfrm>
+          <a:prstGeom prst="rect">
+            <a:avLst/>
+          </a:prstGeom>
+          <a:noFill/>
+        </p:spPr>
+        <p:txBody>
+          <a:bodyPr wrap="square">
+            <a:spAutoFit/>
+          </a:bodyPr>
+          <a:lstStyle/>
+          <a:p>
+            <a:r>
+              <a:rPr sz="1400" b="0" i="0">
                 <a:solidFill>
                   <a:srgbClr val="1A1A17"/>
                 </a:solidFill>
@@ -7800,22 +7800,22 @@
         </p:nvSpPr>
         <p:spPr>
           <a:xfrm>
-            <a:off x="548640" y="3525000"/>
-            <a:ext cx="11064240" cy="340000"/>
-          </a:xfrm>
-          <a:prstGeom prst="rect">
-            <a:avLst/>
-          </a:prstGeom>
-          <a:noFill/>
-        </p:spPr>
-        <p:txBody>
-          <a:bodyPr wrap="square">
-            <a:spAutoFit/>
-          </a:bodyPr>
-          <a:lstStyle/>
-          <a:p>
-            <a:r>
-              <a:rPr sz="1400" b="1" i="0">
+            <a:off x="548640" y="4930000"/>
+            <a:ext cx="11064240" cy="1130000"/>
+          </a:xfrm>
+          <a:prstGeom prst="rect">
+            <a:avLst/>
+          </a:prstGeom>
+          <a:noFill/>
+        </p:spPr>
+        <p:txBody>
+          <a:bodyPr wrap="square">
+            <a:spAutoFit/>
+          </a:bodyPr>
+          <a:lstStyle/>
+          <a:p>
+            <a:r>
+              <a:rPr sz="1750" b="1" i="0">
                 <a:solidFill>
                   <a:srgbClr val="C8603A"/>
                 </a:solidFill>
@@ -7860,22 +7860,22 @@
         </p:nvSpPr>
         <p:spPr>
           <a:xfrm>
-            <a:off x="548640" y="384048"/>
-            <a:ext cx="11064240" cy="365760"/>
-          </a:xfrm>
-          <a:prstGeom prst="rect">
-            <a:avLst/>
-          </a:prstGeom>
-          <a:noFill/>
-        </p:spPr>
-        <p:txBody>
-          <a:bodyPr wrap="square">
-            <a:spAutoFit/>
-          </a:bodyPr>
-          <a:lstStyle/>
-          <a:p>
-            <a:r>
-              <a:rPr sz="1250" b="1" i="0">
+            <a:off x="548640" y="365760"/>
+            <a:ext cx="11064240" cy="400000"/>
+          </a:xfrm>
+          <a:prstGeom prst="rect">
+            <a:avLst/>
+          </a:prstGeom>
+          <a:noFill/>
+        </p:spPr>
+        <p:txBody>
+          <a:bodyPr wrap="square">
+            <a:spAutoFit/>
+          </a:bodyPr>
+          <a:lstStyle/>
+          <a:p>
+            <a:r>
+              <a:rPr sz="1400" b="1" i="0">
                 <a:solidFill>
                   <a:srgbClr val="C8603A"/>
                 </a:solidFill>
@@ -7894,22 +7894,22 @@
         </p:nvSpPr>
         <p:spPr>
           <a:xfrm>
-            <a:off x="548640" y="658368"/>
-            <a:ext cx="11064240" cy="640080"/>
-          </a:xfrm>
-          <a:prstGeom prst="rect">
-            <a:avLst/>
-          </a:prstGeom>
-          <a:noFill/>
-        </p:spPr>
-        <p:txBody>
-          <a:bodyPr wrap="square">
-            <a:spAutoFit/>
-          </a:bodyPr>
-          <a:lstStyle/>
-          <a:p>
-            <a:r>
-              <a:rPr sz="2700" b="1" i="0">
+            <a:off x="548640" y="685800"/>
+            <a:ext cx="11064240" cy="820000"/>
+          </a:xfrm>
+          <a:prstGeom prst="rect">
+            <a:avLst/>
+          </a:prstGeom>
+          <a:noFill/>
+        </p:spPr>
+        <p:txBody>
+          <a:bodyPr wrap="square">
+            <a:spAutoFit/>
+          </a:bodyPr>
+          <a:lstStyle/>
+          <a:p>
+            <a:r>
+              <a:rPr sz="3300" b="1" i="0">
                 <a:solidFill>
                   <a:srgbClr val="1A1A17"/>
                 </a:solidFill>
@@ -7928,7 +7928,7 @@
         </p:nvSpPr>
         <p:spPr>
           <a:xfrm>
-            <a:off x="576072" y="1371600"/>
+            <a:off x="576072" y="1524000"/>
             <a:ext cx="713232" cy="38100"/>
           </a:xfrm>
           <a:prstGeom prst="roundRect">
@@ -7955,22 +7955,22 @@
         </p:nvSpPr>
         <p:spPr>
           <a:xfrm>
-            <a:off x="548640" y="1600000"/>
-            <a:ext cx="11064240" cy="400000"/>
-          </a:xfrm>
-          <a:prstGeom prst="rect">
-            <a:avLst/>
-          </a:prstGeom>
-          <a:noFill/>
-        </p:spPr>
-        <p:txBody>
-          <a:bodyPr wrap="square">
-            <a:spAutoFit/>
-          </a:bodyPr>
-          <a:lstStyle/>
-          <a:p>
-            <a:r>
-              <a:rPr sz="1500" b="0" i="0">
+            <a:off x="548640" y="2177500"/>
+            <a:ext cx="11064240" cy="867500"/>
+          </a:xfrm>
+          <a:prstGeom prst="rect">
+            <a:avLst/>
+          </a:prstGeom>
+          <a:noFill/>
+        </p:spPr>
+        <p:txBody>
+          <a:bodyPr wrap="square">
+            <a:spAutoFit/>
+          </a:bodyPr>
+          <a:lstStyle/>
+          <a:p>
+            <a:r>
+              <a:rPr sz="1850" b="0" i="0">
                 <a:solidFill>
                   <a:srgbClr val="5A5A52"/>
                 </a:solidFill>
@@ -7989,22 +7989,22 @@
         </p:nvSpPr>
         <p:spPr>
           <a:xfrm>
-            <a:off x="548640" y="2190000"/>
-            <a:ext cx="11064240" cy="260000"/>
-          </a:xfrm>
-          <a:prstGeom prst="rect">
-            <a:avLst/>
-          </a:prstGeom>
-          <a:noFill/>
-        </p:spPr>
-        <p:txBody>
-          <a:bodyPr wrap="square">
-            <a:spAutoFit/>
-          </a:bodyPr>
-          <a:lstStyle/>
-          <a:p>
-            <a:r>
-              <a:rPr sz="1050" b="0" i="0">
+            <a:off x="548640" y="2907500"/>
+            <a:ext cx="11064240" cy="707500"/>
+          </a:xfrm>
+          <a:prstGeom prst="rect">
+            <a:avLst/>
+          </a:prstGeom>
+          <a:noFill/>
+        </p:spPr>
+        <p:txBody>
+          <a:bodyPr wrap="square">
+            <a:spAutoFit/>
+          </a:bodyPr>
+          <a:lstStyle/>
+          <a:p>
+            <a:r>
+              <a:rPr sz="1400" b="0" i="0">
                 <a:solidFill>
                   <a:srgbClr val="1A1A17"/>
                 </a:solidFill>
@@ -8023,22 +8023,22 @@
         </p:nvSpPr>
         <p:spPr>
           <a:xfrm>
-            <a:off x="548640" y="2425000"/>
-            <a:ext cx="11064240" cy="260000"/>
-          </a:xfrm>
-          <a:prstGeom prst="rect">
-            <a:avLst/>
-          </a:prstGeom>
-          <a:noFill/>
-        </p:spPr>
-        <p:txBody>
-          <a:bodyPr wrap="square">
-            <a:spAutoFit/>
-          </a:bodyPr>
-          <a:lstStyle/>
-          <a:p>
-            <a:r>
-              <a:rPr sz="1050" b="0" i="0">
+            <a:off x="548640" y="3207500"/>
+            <a:ext cx="11064240" cy="707500"/>
+          </a:xfrm>
+          <a:prstGeom prst="rect">
+            <a:avLst/>
+          </a:prstGeom>
+          <a:noFill/>
+        </p:spPr>
+        <p:txBody>
+          <a:bodyPr wrap="square">
+            <a:spAutoFit/>
+          </a:bodyPr>
+          <a:lstStyle/>
+          <a:p>
+            <a:r>
+              <a:rPr sz="1400" b="0" i="0">
                 <a:solidFill>
                   <a:srgbClr val="1A1A17"/>
                 </a:solidFill>
@@ -8057,22 +8057,22 @@
         </p:nvSpPr>
         <p:spPr>
           <a:xfrm>
-            <a:off x="548640" y="2660000"/>
-            <a:ext cx="11064240" cy="260000"/>
-          </a:xfrm>
-          <a:prstGeom prst="rect">
-            <a:avLst/>
-          </a:prstGeom>
-          <a:noFill/>
-        </p:spPr>
-        <p:txBody>
-          <a:bodyPr wrap="square">
-            <a:spAutoFit/>
-          </a:bodyPr>
-          <a:lstStyle/>
-          <a:p>
-            <a:r>
-              <a:rPr sz="1050" b="0" i="0">
+            <a:off x="548640" y="3507500"/>
+            <a:ext cx="11064240" cy="707500"/>
+          </a:xfrm>
+          <a:prstGeom prst="rect">
+            <a:avLst/>
+          </a:prstGeom>
+          <a:noFill/>
+        </p:spPr>
+        <p:txBody>
+          <a:bodyPr wrap="square">
+            <a:spAutoFit/>
+          </a:bodyPr>
+          <a:lstStyle/>
+          <a:p>
+            <a:r>
+              <a:rPr sz="1400" b="0" i="0">
                 <a:solidFill>
                   <a:srgbClr val="1A1A17"/>
                 </a:solidFill>
@@ -8091,22 +8091,22 @@
         </p:nvSpPr>
         <p:spPr>
           <a:xfrm>
-            <a:off x="548640" y="2895000"/>
-            <a:ext cx="11064240" cy="260000"/>
-          </a:xfrm>
-          <a:prstGeom prst="rect">
-            <a:avLst/>
-          </a:prstGeom>
-          <a:noFill/>
-        </p:spPr>
-        <p:txBody>
-          <a:bodyPr wrap="square">
-            <a:spAutoFit/>
-          </a:bodyPr>
-          <a:lstStyle/>
-          <a:p>
-            <a:r>
-              <a:rPr sz="1050" b="0" i="0">
+            <a:off x="548640" y="3807500"/>
+            <a:ext cx="11064240" cy="707500"/>
+          </a:xfrm>
+          <a:prstGeom prst="rect">
+            <a:avLst/>
+          </a:prstGeom>
+          <a:noFill/>
+        </p:spPr>
+        <p:txBody>
+          <a:bodyPr wrap="square">
+            <a:spAutoFit/>
+          </a:bodyPr>
+          <a:lstStyle/>
+          <a:p>
+            <a:r>
+              <a:rPr sz="1400" b="0" i="0">
                 <a:solidFill>
                   <a:srgbClr val="1A1A17"/>
                 </a:solidFill>
@@ -8125,22 +8125,22 @@
         </p:nvSpPr>
         <p:spPr>
           <a:xfrm>
-            <a:off x="548640" y="3130000"/>
-            <a:ext cx="11064240" cy="260000"/>
-          </a:xfrm>
-          <a:prstGeom prst="rect">
-            <a:avLst/>
-          </a:prstGeom>
-          <a:noFill/>
-        </p:spPr>
-        <p:txBody>
-          <a:bodyPr wrap="square">
-            <a:spAutoFit/>
-          </a:bodyPr>
-          <a:lstStyle/>
-          <a:p>
-            <a:r>
-              <a:rPr sz="1050" b="0" i="0">
+            <a:off x="548640" y="4107500"/>
+            <a:ext cx="11064240" cy="707500"/>
+          </a:xfrm>
+          <a:prstGeom prst="rect">
+            <a:avLst/>
+          </a:prstGeom>
+          <a:noFill/>
+        </p:spPr>
+        <p:txBody>
+          <a:bodyPr wrap="square">
+            <a:spAutoFit/>
+          </a:bodyPr>
+          <a:lstStyle/>
+          <a:p>
+            <a:r>
+              <a:rPr sz="1400" b="0" i="0">
                 <a:solidFill>
                   <a:srgbClr val="1A1A17"/>
                 </a:solidFill>
@@ -8159,22 +8159,22 @@
         </p:nvSpPr>
         <p:spPr>
           <a:xfrm>
-            <a:off x="548640" y="3365000"/>
-            <a:ext cx="11064240" cy="260000"/>
-          </a:xfrm>
-          <a:prstGeom prst="rect">
-            <a:avLst/>
-          </a:prstGeom>
-          <a:noFill/>
-        </p:spPr>
-        <p:txBody>
-          <a:bodyPr wrap="square">
-            <a:spAutoFit/>
-          </a:bodyPr>
-          <a:lstStyle/>
-          <a:p>
-            <a:r>
-              <a:rPr sz="1050" b="0" i="0">
+            <a:off x="548640" y="4407500"/>
+            <a:ext cx="11064240" cy="707500"/>
+          </a:xfrm>
+          <a:prstGeom prst="rect">
+            <a:avLst/>
+          </a:prstGeom>
+          <a:noFill/>
+        </p:spPr>
+        <p:txBody>
+          <a:bodyPr wrap="square">
+            <a:spAutoFit/>
+          </a:bodyPr>
+          <a:lstStyle/>
+          <a:p>
+            <a:r>
+              <a:rPr sz="1400" b="0" i="0">
                 <a:solidFill>
                   <a:srgbClr val="1A1A17"/>
                 </a:solidFill>
@@ -8193,22 +8193,22 @@
         </p:nvSpPr>
         <p:spPr>
           <a:xfrm>
-            <a:off x="548640" y="3600000"/>
-            <a:ext cx="11064240" cy="260000"/>
-          </a:xfrm>
-          <a:prstGeom prst="rect">
-            <a:avLst/>
-          </a:prstGeom>
-          <a:noFill/>
-        </p:spPr>
-        <p:txBody>
-          <a:bodyPr wrap="square">
-            <a:spAutoFit/>
-          </a:bodyPr>
-          <a:lstStyle/>
-          <a:p>
-            <a:r>
-              <a:rPr sz="1050" b="0" i="0">
+            <a:off x="548640" y="4707500"/>
+            <a:ext cx="11064240" cy="707500"/>
+          </a:xfrm>
+          <a:prstGeom prst="rect">
+            <a:avLst/>
+          </a:prstGeom>
+          <a:noFill/>
+        </p:spPr>
+        <p:txBody>
+          <a:bodyPr wrap="square">
+            <a:spAutoFit/>
+          </a:bodyPr>
+          <a:lstStyle/>
+          <a:p>
+            <a:r>
+              <a:rPr sz="1400" b="0" i="0">
                 <a:solidFill>
                   <a:srgbClr val="1A1A17"/>
                 </a:solidFill>
@@ -8227,22 +8227,22 @@
         </p:nvSpPr>
         <p:spPr>
           <a:xfrm>
-            <a:off x="548640" y="3835000"/>
-            <a:ext cx="11064240" cy="260000"/>
-          </a:xfrm>
-          <a:prstGeom prst="rect">
-            <a:avLst/>
-          </a:prstGeom>
-          <a:noFill/>
-        </p:spPr>
-        <p:txBody>
-          <a:bodyPr wrap="square">
-            <a:spAutoFit/>
-          </a:bodyPr>
-          <a:lstStyle/>
-          <a:p>
-            <a:r>
-              <a:rPr sz="1050" b="0" i="0">
+            <a:off x="548640" y="5007500"/>
+            <a:ext cx="11064240" cy="707500"/>
+          </a:xfrm>
+          <a:prstGeom prst="rect">
+            <a:avLst/>
+          </a:prstGeom>
+          <a:noFill/>
+        </p:spPr>
+        <p:txBody>
+          <a:bodyPr wrap="square">
+            <a:spAutoFit/>
+          </a:bodyPr>
+          <a:lstStyle/>
+          <a:p>
+            <a:r>
+              <a:rPr sz="1400" b="0" i="0">
                 <a:solidFill>
                   <a:srgbClr val="1A1A17"/>
                 </a:solidFill>
@@ -8261,22 +8261,22 @@
         </p:nvSpPr>
         <p:spPr>
           <a:xfrm>
-            <a:off x="548640" y="4070000"/>
-            <a:ext cx="11064240" cy="260000"/>
-          </a:xfrm>
-          <a:prstGeom prst="rect">
-            <a:avLst/>
-          </a:prstGeom>
-          <a:noFill/>
-        </p:spPr>
-        <p:txBody>
-          <a:bodyPr wrap="square">
-            <a:spAutoFit/>
-          </a:bodyPr>
-          <a:lstStyle/>
-          <a:p>
-            <a:r>
-              <a:rPr sz="1050" b="0" i="0">
+            <a:off x="548640" y="5307500"/>
+            <a:ext cx="11064240" cy="707500"/>
+          </a:xfrm>
+          <a:prstGeom prst="rect">
+            <a:avLst/>
+          </a:prstGeom>
+          <a:noFill/>
+        </p:spPr>
+        <p:txBody>
+          <a:bodyPr wrap="square">
+            <a:spAutoFit/>
+          </a:bodyPr>
+          <a:lstStyle/>
+          <a:p>
+            <a:r>
+              <a:rPr sz="1400" b="0" i="0">
                 <a:solidFill>
                   <a:srgbClr val="1A1A17"/>
                 </a:solidFill>
@@ -8295,22 +8295,22 @@
         </p:nvSpPr>
         <p:spPr>
           <a:xfrm>
-            <a:off x="548640" y="4465000"/>
-            <a:ext cx="11064240" cy="340000"/>
-          </a:xfrm>
-          <a:prstGeom prst="rect">
-            <a:avLst/>
-          </a:prstGeom>
-          <a:noFill/>
-        </p:spPr>
-        <p:txBody>
-          <a:bodyPr wrap="square">
-            <a:spAutoFit/>
-          </a:bodyPr>
-          <a:lstStyle/>
-          <a:p>
-            <a:r>
-              <a:rPr sz="1400" b="0" i="0">
+            <a:off x="548640" y="5807500"/>
+            <a:ext cx="11064240" cy="807500"/>
+          </a:xfrm>
+          <a:prstGeom prst="rect">
+            <a:avLst/>
+          </a:prstGeom>
+          <a:noFill/>
+        </p:spPr>
+        <p:txBody>
+          <a:bodyPr wrap="square">
+            <a:spAutoFit/>
+          </a:bodyPr>
+          <a:lstStyle/>
+          <a:p>
+            <a:r>
+              <a:rPr sz="1750" b="0" i="0">
                 <a:solidFill>
                   <a:srgbClr val="1A1A17"/>
                 </a:solidFill>
@@ -8355,22 +8355,22 @@
         </p:nvSpPr>
         <p:spPr>
           <a:xfrm>
-            <a:off x="548640" y="384048"/>
-            <a:ext cx="11064240" cy="365760"/>
-          </a:xfrm>
-          <a:prstGeom prst="rect">
-            <a:avLst/>
-          </a:prstGeom>
-          <a:noFill/>
-        </p:spPr>
-        <p:txBody>
-          <a:bodyPr wrap="square">
-            <a:spAutoFit/>
-          </a:bodyPr>
-          <a:lstStyle/>
-          <a:p>
-            <a:r>
-              <a:rPr sz="1250" b="1" i="0">
+            <a:off x="548640" y="365760"/>
+            <a:ext cx="11064240" cy="400000"/>
+          </a:xfrm>
+          <a:prstGeom prst="rect">
+            <a:avLst/>
+          </a:prstGeom>
+          <a:noFill/>
+        </p:spPr>
+        <p:txBody>
+          <a:bodyPr wrap="square">
+            <a:spAutoFit/>
+          </a:bodyPr>
+          <a:lstStyle/>
+          <a:p>
+            <a:r>
+              <a:rPr sz="1400" b="1" i="0">
                 <a:solidFill>
                   <a:srgbClr val="C8603A"/>
                 </a:solidFill>
@@ -8389,22 +8389,22 @@
         </p:nvSpPr>
         <p:spPr>
           <a:xfrm>
-            <a:off x="548640" y="658368"/>
-            <a:ext cx="11064240" cy="640080"/>
-          </a:xfrm>
-          <a:prstGeom prst="rect">
-            <a:avLst/>
-          </a:prstGeom>
-          <a:noFill/>
-        </p:spPr>
-        <p:txBody>
-          <a:bodyPr wrap="square">
-            <a:spAutoFit/>
-          </a:bodyPr>
-          <a:lstStyle/>
-          <a:p>
-            <a:r>
-              <a:rPr sz="2700" b="1" i="0">
+            <a:off x="548640" y="685800"/>
+            <a:ext cx="11064240" cy="820000"/>
+          </a:xfrm>
+          <a:prstGeom prst="rect">
+            <a:avLst/>
+          </a:prstGeom>
+          <a:noFill/>
+        </p:spPr>
+        <p:txBody>
+          <a:bodyPr wrap="square">
+            <a:spAutoFit/>
+          </a:bodyPr>
+          <a:lstStyle/>
+          <a:p>
+            <a:r>
+              <a:rPr sz="3300" b="1" i="0">
                 <a:solidFill>
                   <a:srgbClr val="1A1A17"/>
                 </a:solidFill>
@@ -8423,7 +8423,7 @@
         </p:nvSpPr>
         <p:spPr>
           <a:xfrm>
-            <a:off x="576072" y="1371600"/>
+            <a:off x="576072" y="1524000"/>
             <a:ext cx="713232" cy="38100"/>
           </a:xfrm>
           <a:prstGeom prst="roundRect">
@@ -8450,22 +8450,22 @@
         </p:nvSpPr>
         <p:spPr>
           <a:xfrm>
-            <a:off x="548640" y="1600000"/>
-            <a:ext cx="11064240" cy="400000"/>
-          </a:xfrm>
-          <a:prstGeom prst="rect">
-            <a:avLst/>
-          </a:prstGeom>
-          <a:noFill/>
-        </p:spPr>
-        <p:txBody>
-          <a:bodyPr wrap="square">
-            <a:spAutoFit/>
-          </a:bodyPr>
-          <a:lstStyle/>
-          <a:p>
-            <a:r>
-              <a:rPr sz="1500" b="0" i="0">
+            <a:off x="548640" y="2472500"/>
+            <a:ext cx="11064240" cy="1162500"/>
+          </a:xfrm>
+          <a:prstGeom prst="rect">
+            <a:avLst/>
+          </a:prstGeom>
+          <a:noFill/>
+        </p:spPr>
+        <p:txBody>
+          <a:bodyPr wrap="square">
+            <a:spAutoFit/>
+          </a:bodyPr>
+          <a:lstStyle/>
+          <a:p>
+            <a:r>
+              <a:rPr sz="1850" b="0" i="0">
                 <a:solidFill>
                   <a:srgbClr val="5A5A52"/>
                 </a:solidFill>
@@ -8484,22 +8484,22 @@
         </p:nvSpPr>
         <p:spPr>
           <a:xfrm>
-            <a:off x="548640" y="2190000"/>
-            <a:ext cx="11064240" cy="260000"/>
-          </a:xfrm>
-          <a:prstGeom prst="rect">
-            <a:avLst/>
-          </a:prstGeom>
-          <a:noFill/>
-        </p:spPr>
-        <p:txBody>
-          <a:bodyPr wrap="square">
-            <a:spAutoFit/>
-          </a:bodyPr>
-          <a:lstStyle/>
-          <a:p>
-            <a:r>
-              <a:rPr sz="1050" b="0" i="0">
+            <a:off x="548640" y="3202500"/>
+            <a:ext cx="11064240" cy="1002500"/>
+          </a:xfrm>
+          <a:prstGeom prst="rect">
+            <a:avLst/>
+          </a:prstGeom>
+          <a:noFill/>
+        </p:spPr>
+        <p:txBody>
+          <a:bodyPr wrap="square">
+            <a:spAutoFit/>
+          </a:bodyPr>
+          <a:lstStyle/>
+          <a:p>
+            <a:r>
+              <a:rPr sz="1400" b="0" i="0">
                 <a:solidFill>
                   <a:srgbClr val="1A1A17"/>
                 </a:solidFill>
@@ -8518,22 +8518,22 @@
         </p:nvSpPr>
         <p:spPr>
           <a:xfrm>
-            <a:off x="548640" y="2425000"/>
-            <a:ext cx="11064240" cy="260000"/>
-          </a:xfrm>
-          <a:prstGeom prst="rect">
-            <a:avLst/>
-          </a:prstGeom>
-          <a:noFill/>
-        </p:spPr>
-        <p:txBody>
-          <a:bodyPr wrap="square">
-            <a:spAutoFit/>
-          </a:bodyPr>
-          <a:lstStyle/>
-          <a:p>
-            <a:r>
-              <a:rPr sz="1050" b="0" i="0">
+            <a:off x="548640" y="3502500"/>
+            <a:ext cx="11064240" cy="1002500"/>
+          </a:xfrm>
+          <a:prstGeom prst="rect">
+            <a:avLst/>
+          </a:prstGeom>
+          <a:noFill/>
+        </p:spPr>
+        <p:txBody>
+          <a:bodyPr wrap="square">
+            <a:spAutoFit/>
+          </a:bodyPr>
+          <a:lstStyle/>
+          <a:p>
+            <a:r>
+              <a:rPr sz="1400" b="0" i="0">
                 <a:solidFill>
                   <a:srgbClr val="1A1A17"/>
                 </a:solidFill>
@@ -8552,22 +8552,22 @@
         </p:nvSpPr>
         <p:spPr>
           <a:xfrm>
-            <a:off x="548640" y="2660000"/>
-            <a:ext cx="11064240" cy="260000"/>
-          </a:xfrm>
-          <a:prstGeom prst="rect">
-            <a:avLst/>
-          </a:prstGeom>
-          <a:noFill/>
-        </p:spPr>
-        <p:txBody>
-          <a:bodyPr wrap="square">
-            <a:spAutoFit/>
-          </a:bodyPr>
-          <a:lstStyle/>
-          <a:p>
-            <a:r>
-              <a:rPr sz="1050" b="0" i="0">
+            <a:off x="548640" y="3802500"/>
+            <a:ext cx="11064240" cy="1002500"/>
+          </a:xfrm>
+          <a:prstGeom prst="rect">
+            <a:avLst/>
+          </a:prstGeom>
+          <a:noFill/>
+        </p:spPr>
+        <p:txBody>
+          <a:bodyPr wrap="square">
+            <a:spAutoFit/>
+          </a:bodyPr>
+          <a:lstStyle/>
+          <a:p>
+            <a:r>
+              <a:rPr sz="1400" b="0" i="0">
                 <a:solidFill>
                   <a:srgbClr val="1A1A17"/>
                 </a:solidFill>
@@ -8586,22 +8586,22 @@
         </p:nvSpPr>
         <p:spPr>
           <a:xfrm>
-            <a:off x="548640" y="2895000"/>
-            <a:ext cx="11064240" cy="260000"/>
-          </a:xfrm>
-          <a:prstGeom prst="rect">
-            <a:avLst/>
-          </a:prstGeom>
-          <a:noFill/>
-        </p:spPr>
-        <p:txBody>
-          <a:bodyPr wrap="square">
-            <a:spAutoFit/>
-          </a:bodyPr>
-          <a:lstStyle/>
-          <a:p>
-            <a:r>
-              <a:rPr sz="1050" b="0" i="0">
+            <a:off x="548640" y="4102500"/>
+            <a:ext cx="11064240" cy="1002500"/>
+          </a:xfrm>
+          <a:prstGeom prst="rect">
+            <a:avLst/>
+          </a:prstGeom>
+          <a:noFill/>
+        </p:spPr>
+        <p:txBody>
+          <a:bodyPr wrap="square">
+            <a:spAutoFit/>
+          </a:bodyPr>
+          <a:lstStyle/>
+          <a:p>
+            <a:r>
+              <a:rPr sz="1400" b="0" i="0">
                 <a:solidFill>
                   <a:srgbClr val="1A1A17"/>
                 </a:solidFill>
@@ -8620,22 +8620,22 @@
         </p:nvSpPr>
         <p:spPr>
           <a:xfrm>
-            <a:off x="548640" y="3130000"/>
-            <a:ext cx="11064240" cy="260000"/>
-          </a:xfrm>
-          <a:prstGeom prst="rect">
-            <a:avLst/>
-          </a:prstGeom>
-          <a:noFill/>
-        </p:spPr>
-        <p:txBody>
-          <a:bodyPr wrap="square">
-            <a:spAutoFit/>
-          </a:bodyPr>
-          <a:lstStyle/>
-          <a:p>
-            <a:r>
-              <a:rPr sz="1050" b="0" i="0">
+            <a:off x="548640" y="4402500"/>
+            <a:ext cx="11064240" cy="1002500"/>
+          </a:xfrm>
+          <a:prstGeom prst="rect">
+            <a:avLst/>
+          </a:prstGeom>
+          <a:noFill/>
+        </p:spPr>
+        <p:txBody>
+          <a:bodyPr wrap="square">
+            <a:spAutoFit/>
+          </a:bodyPr>
+          <a:lstStyle/>
+          <a:p>
+            <a:r>
+              <a:rPr sz="1400" b="0" i="0">
                 <a:solidFill>
                   <a:srgbClr val="1A1A17"/>
                 </a:solidFill>
@@ -8654,22 +8654,22 @@
         </p:nvSpPr>
         <p:spPr>
           <a:xfrm>
-            <a:off x="548640" y="3365000"/>
-            <a:ext cx="11064240" cy="260000"/>
-          </a:xfrm>
-          <a:prstGeom prst="rect">
-            <a:avLst/>
-          </a:prstGeom>
-          <a:noFill/>
-        </p:spPr>
-        <p:txBody>
-          <a:bodyPr wrap="square">
-            <a:spAutoFit/>
-          </a:bodyPr>
-          <a:lstStyle/>
-          <a:p>
-            <a:r>
-              <a:rPr sz="1050" b="0" i="0">
+            <a:off x="548640" y="4702500"/>
+            <a:ext cx="11064240" cy="1002500"/>
+          </a:xfrm>
+          <a:prstGeom prst="rect">
+            <a:avLst/>
+          </a:prstGeom>
+          <a:noFill/>
+        </p:spPr>
+        <p:txBody>
+          <a:bodyPr wrap="square">
+            <a:spAutoFit/>
+          </a:bodyPr>
+          <a:lstStyle/>
+          <a:p>
+            <a:r>
+              <a:rPr sz="1400" b="0" i="0">
                 <a:solidFill>
                   <a:srgbClr val="1A1A17"/>
                 </a:solidFill>
@@ -8688,22 +8688,22 @@
         </p:nvSpPr>
         <p:spPr>
           <a:xfrm>
-            <a:off x="548640" y="3600000"/>
-            <a:ext cx="11064240" cy="260000"/>
-          </a:xfrm>
-          <a:prstGeom prst="rect">
-            <a:avLst/>
-          </a:prstGeom>
-          <a:noFill/>
-        </p:spPr>
-        <p:txBody>
-          <a:bodyPr wrap="square">
-            <a:spAutoFit/>
-          </a:bodyPr>
-          <a:lstStyle/>
-          <a:p>
-            <a:r>
-              <a:rPr sz="1050" b="0" i="0">
+            <a:off x="548640" y="5002500"/>
+            <a:ext cx="11064240" cy="1002500"/>
+          </a:xfrm>
+          <a:prstGeom prst="rect">
+            <a:avLst/>
+          </a:prstGeom>
+          <a:noFill/>
+        </p:spPr>
+        <p:txBody>
+          <a:bodyPr wrap="square">
+            <a:spAutoFit/>
+          </a:bodyPr>
+          <a:lstStyle/>
+          <a:p>
+            <a:r>
+              <a:rPr sz="1400" b="0" i="0">
                 <a:solidFill>
                   <a:srgbClr val="1A1A17"/>
                 </a:solidFill>
@@ -8722,22 +8722,22 @@
         </p:nvSpPr>
         <p:spPr>
           <a:xfrm>
-            <a:off x="548640" y="3995000"/>
-            <a:ext cx="11064240" cy="340000"/>
-          </a:xfrm>
-          <a:prstGeom prst="rect">
-            <a:avLst/>
-          </a:prstGeom>
-          <a:noFill/>
-        </p:spPr>
-        <p:txBody>
-          <a:bodyPr wrap="square">
-            <a:spAutoFit/>
-          </a:bodyPr>
-          <a:lstStyle/>
-          <a:p>
-            <a:r>
-              <a:rPr sz="1400" b="1" i="0">
+            <a:off x="548640" y="5502500"/>
+            <a:ext cx="11064240" cy="1102500"/>
+          </a:xfrm>
+          <a:prstGeom prst="rect">
+            <a:avLst/>
+          </a:prstGeom>
+          <a:noFill/>
+        </p:spPr>
+        <p:txBody>
+          <a:bodyPr wrap="square">
+            <a:spAutoFit/>
+          </a:bodyPr>
+          <a:lstStyle/>
+          <a:p>
+            <a:r>
+              <a:rPr sz="1750" b="1" i="0">
                 <a:solidFill>
                   <a:srgbClr val="B3261E"/>
                 </a:solidFill>
